--- a/docs/pptx/entire/ritu-entire-linsubhr-ratio-hosp8_10pct.pptx
+++ b/docs/pptx/entire/ritu-entire-linsubhr-ratio-hosp8_10pct.pptx
@@ -3432,612 +3432,612 @@
           </p:nvSpPr>
           <p:spPr>
             <a:xfrm>
-              <a:off x="1172049" y="2389936"/>
-              <a:ext cx="7090630" cy="2971029"/>
+              <a:off x="1172049" y="2370694"/>
+              <a:ext cx="7090630" cy="2991546"/>
             </a:xfrm>
             <a:custGeom>
               <a:avLst/>
               <a:pathLst>
-                <a:path w="7090630" h="2971029">
+                <a:path w="7090630" h="2991546">
                   <a:moveTo>
                     <a:pt x="0" y="0"/>
                   </a:moveTo>
                   <a:lnTo>
-                    <a:pt x="71622" y="87737"/>
-                  </a:lnTo>
-                  <a:lnTo>
-                    <a:pt x="143245" y="173043"/>
-                  </a:lnTo>
-                  <a:lnTo>
-                    <a:pt x="214867" y="255987"/>
-                  </a:lnTo>
-                  <a:lnTo>
-                    <a:pt x="286490" y="336633"/>
-                  </a:lnTo>
-                  <a:lnTo>
-                    <a:pt x="358112" y="415045"/>
-                  </a:lnTo>
-                  <a:lnTo>
-                    <a:pt x="429735" y="491285"/>
-                  </a:lnTo>
-                  <a:lnTo>
-                    <a:pt x="501357" y="565413"/>
-                  </a:lnTo>
-                  <a:lnTo>
-                    <a:pt x="572980" y="637488"/>
-                  </a:lnTo>
-                  <a:lnTo>
-                    <a:pt x="644602" y="707566"/>
-                  </a:lnTo>
-                  <a:lnTo>
-                    <a:pt x="716225" y="775703"/>
-                  </a:lnTo>
-                  <a:lnTo>
-                    <a:pt x="787847" y="841953"/>
-                  </a:lnTo>
-                  <a:lnTo>
-                    <a:pt x="859470" y="906367"/>
-                  </a:lnTo>
-                  <a:lnTo>
-                    <a:pt x="931092" y="968997"/>
-                  </a:lnTo>
-                  <a:lnTo>
-                    <a:pt x="1002715" y="1029892"/>
-                  </a:lnTo>
-                  <a:lnTo>
-                    <a:pt x="1074337" y="1089100"/>
-                  </a:lnTo>
-                  <a:lnTo>
-                    <a:pt x="1145960" y="1146668"/>
-                  </a:lnTo>
-                  <a:lnTo>
-                    <a:pt x="1217582" y="1202642"/>
-                  </a:lnTo>
-                  <a:lnTo>
-                    <a:pt x="1289205" y="1257065"/>
-                  </a:lnTo>
-                  <a:lnTo>
-                    <a:pt x="1360827" y="1309980"/>
-                  </a:lnTo>
-                  <a:lnTo>
-                    <a:pt x="1432450" y="1361430"/>
-                  </a:lnTo>
-                  <a:lnTo>
-                    <a:pt x="1504073" y="1411454"/>
-                  </a:lnTo>
-                  <a:lnTo>
-                    <a:pt x="1575695" y="1460093"/>
-                  </a:lnTo>
-                  <a:lnTo>
-                    <a:pt x="1647318" y="1507384"/>
-                  </a:lnTo>
-                  <a:lnTo>
-                    <a:pt x="1718940" y="1553366"/>
-                  </a:lnTo>
-                  <a:lnTo>
-                    <a:pt x="1790563" y="1598073"/>
-                  </a:lnTo>
-                  <a:lnTo>
-                    <a:pt x="1862185" y="1641542"/>
-                  </a:lnTo>
-                  <a:lnTo>
-                    <a:pt x="1933808" y="1683807"/>
-                  </a:lnTo>
-                  <a:lnTo>
-                    <a:pt x="2005430" y="1724902"/>
-                  </a:lnTo>
-                  <a:lnTo>
-                    <a:pt x="2077053" y="1764858"/>
-                  </a:lnTo>
-                  <a:lnTo>
-                    <a:pt x="2148675" y="1803707"/>
-                  </a:lnTo>
-                  <a:lnTo>
-                    <a:pt x="2220298" y="1841480"/>
-                  </a:lnTo>
-                  <a:lnTo>
-                    <a:pt x="2291920" y="1878206"/>
-                  </a:lnTo>
-                  <a:lnTo>
-                    <a:pt x="2363543" y="1913916"/>
-                  </a:lnTo>
-                  <a:lnTo>
-                    <a:pt x="2435165" y="1948636"/>
-                  </a:lnTo>
-                  <a:lnTo>
-                    <a:pt x="2506788" y="1982394"/>
-                  </a:lnTo>
-                  <a:lnTo>
-                    <a:pt x="2578410" y="2015217"/>
-                  </a:lnTo>
-                  <a:lnTo>
-                    <a:pt x="2650033" y="2047131"/>
-                  </a:lnTo>
-                  <a:lnTo>
-                    <a:pt x="2721655" y="2078161"/>
-                  </a:lnTo>
-                  <a:lnTo>
-                    <a:pt x="2793278" y="2108332"/>
-                  </a:lnTo>
-                  <a:lnTo>
-                    <a:pt x="2864901" y="2137666"/>
-                  </a:lnTo>
-                  <a:lnTo>
-                    <a:pt x="2936523" y="2166188"/>
-                  </a:lnTo>
-                  <a:lnTo>
-                    <a:pt x="3008146" y="2193920"/>
-                  </a:lnTo>
-                  <a:lnTo>
-                    <a:pt x="3079768" y="2220884"/>
-                  </a:lnTo>
-                  <a:lnTo>
-                    <a:pt x="3151391" y="2247101"/>
-                  </a:lnTo>
-                  <a:lnTo>
-                    <a:pt x="3223013" y="2272591"/>
-                  </a:lnTo>
-                  <a:lnTo>
-                    <a:pt x="3294636" y="2297376"/>
-                  </a:lnTo>
-                  <a:lnTo>
-                    <a:pt x="3366258" y="2321474"/>
-                  </a:lnTo>
-                  <a:lnTo>
-                    <a:pt x="3437881" y="2338051"/>
-                  </a:lnTo>
-                  <a:lnTo>
-                    <a:pt x="3509503" y="2338713"/>
-                  </a:lnTo>
-                  <a:lnTo>
-                    <a:pt x="3581126" y="2339375"/>
-                  </a:lnTo>
-                  <a:lnTo>
-                    <a:pt x="3652748" y="2340036"/>
-                  </a:lnTo>
-                  <a:lnTo>
-                    <a:pt x="3724371" y="2340697"/>
-                  </a:lnTo>
-                  <a:lnTo>
-                    <a:pt x="3795993" y="2341358"/>
-                  </a:lnTo>
-                  <a:lnTo>
-                    <a:pt x="3867616" y="2342018"/>
-                  </a:lnTo>
-                  <a:lnTo>
-                    <a:pt x="3939238" y="2342677"/>
-                  </a:lnTo>
-                  <a:lnTo>
-                    <a:pt x="4010861" y="2343336"/>
-                  </a:lnTo>
-                  <a:lnTo>
-                    <a:pt x="4082483" y="2343994"/>
-                  </a:lnTo>
-                  <a:lnTo>
-                    <a:pt x="4154106" y="2344652"/>
-                  </a:lnTo>
-                  <a:lnTo>
-                    <a:pt x="4225729" y="2345309"/>
-                  </a:lnTo>
-                  <a:lnTo>
-                    <a:pt x="4297351" y="2345966"/>
-                  </a:lnTo>
-                  <a:lnTo>
-                    <a:pt x="4368974" y="2346622"/>
-                  </a:lnTo>
-                  <a:lnTo>
-                    <a:pt x="4440596" y="2347277"/>
-                  </a:lnTo>
-                  <a:lnTo>
-                    <a:pt x="4512219" y="2347933"/>
-                  </a:lnTo>
-                  <a:lnTo>
-                    <a:pt x="4583841" y="2348587"/>
-                  </a:lnTo>
-                  <a:lnTo>
-                    <a:pt x="4655464" y="2349241"/>
-                  </a:lnTo>
-                  <a:lnTo>
-                    <a:pt x="4727086" y="2349895"/>
-                  </a:lnTo>
-                  <a:lnTo>
-                    <a:pt x="4798709" y="2350548"/>
-                  </a:lnTo>
-                  <a:lnTo>
-                    <a:pt x="4870331" y="2351200"/>
-                  </a:lnTo>
-                  <a:lnTo>
-                    <a:pt x="4941954" y="2351852"/>
-                  </a:lnTo>
-                  <a:lnTo>
-                    <a:pt x="5013576" y="2352504"/>
-                  </a:lnTo>
-                  <a:lnTo>
-                    <a:pt x="5085199" y="2353155"/>
-                  </a:lnTo>
-                  <a:lnTo>
-                    <a:pt x="5156821" y="2353805"/>
-                  </a:lnTo>
-                  <a:lnTo>
-                    <a:pt x="5228444" y="2354455"/>
-                  </a:lnTo>
-                  <a:lnTo>
-                    <a:pt x="5300066" y="2355105"/>
-                  </a:lnTo>
-                  <a:lnTo>
-                    <a:pt x="5371689" y="2355753"/>
-                  </a:lnTo>
-                  <a:lnTo>
-                    <a:pt x="5443311" y="2356402"/>
-                  </a:lnTo>
-                  <a:lnTo>
-                    <a:pt x="5514934" y="2357050"/>
-                  </a:lnTo>
-                  <a:lnTo>
-                    <a:pt x="5586557" y="2357697"/>
-                  </a:lnTo>
-                  <a:lnTo>
-                    <a:pt x="5658179" y="2358344"/>
-                  </a:lnTo>
-                  <a:lnTo>
-                    <a:pt x="5729802" y="2358990"/>
-                  </a:lnTo>
-                  <a:lnTo>
-                    <a:pt x="5801424" y="2359636"/>
-                  </a:lnTo>
-                  <a:lnTo>
-                    <a:pt x="5873047" y="2360281"/>
-                  </a:lnTo>
-                  <a:lnTo>
-                    <a:pt x="5944669" y="2360926"/>
-                  </a:lnTo>
-                  <a:lnTo>
-                    <a:pt x="6016292" y="2361570"/>
-                  </a:lnTo>
-                  <a:lnTo>
-                    <a:pt x="6087914" y="2362214"/>
-                  </a:lnTo>
-                  <a:lnTo>
-                    <a:pt x="6159537" y="2362857"/>
-                  </a:lnTo>
-                  <a:lnTo>
-                    <a:pt x="6231159" y="2363500"/>
-                  </a:lnTo>
-                  <a:lnTo>
-                    <a:pt x="6302782" y="2364142"/>
-                  </a:lnTo>
-                  <a:lnTo>
-                    <a:pt x="6374404" y="2364783"/>
-                  </a:lnTo>
-                  <a:lnTo>
-                    <a:pt x="6446027" y="2365425"/>
-                  </a:lnTo>
-                  <a:lnTo>
-                    <a:pt x="6517649" y="2366065"/>
-                  </a:lnTo>
-                  <a:lnTo>
-                    <a:pt x="6589272" y="2366705"/>
-                  </a:lnTo>
-                  <a:lnTo>
-                    <a:pt x="6660894" y="2367345"/>
-                  </a:lnTo>
-                  <a:lnTo>
-                    <a:pt x="6732517" y="2367984"/>
-                  </a:lnTo>
-                  <a:lnTo>
-                    <a:pt x="6804139" y="2368623"/>
-                  </a:lnTo>
-                  <a:lnTo>
-                    <a:pt x="6875762" y="2369261"/>
-                  </a:lnTo>
-                  <a:lnTo>
-                    <a:pt x="6947385" y="2369898"/>
-                  </a:lnTo>
-                  <a:lnTo>
-                    <a:pt x="7019007" y="2370535"/>
-                  </a:lnTo>
-                  <a:lnTo>
-                    <a:pt x="7090630" y="2371172"/>
-                  </a:lnTo>
-                  <a:lnTo>
-                    <a:pt x="7090630" y="2971029"/>
-                  </a:lnTo>
-                  <a:lnTo>
-                    <a:pt x="7019007" y="2965437"/>
-                  </a:lnTo>
-                  <a:lnTo>
-                    <a:pt x="6947385" y="2959685"/>
-                  </a:lnTo>
-                  <a:lnTo>
-                    <a:pt x="6875762" y="2953770"/>
-                  </a:lnTo>
-                  <a:lnTo>
-                    <a:pt x="6804139" y="2947686"/>
-                  </a:lnTo>
-                  <a:lnTo>
-                    <a:pt x="6732517" y="2941429"/>
-                  </a:lnTo>
-                  <a:lnTo>
-                    <a:pt x="6660894" y="2934994"/>
-                  </a:lnTo>
-                  <a:lnTo>
-                    <a:pt x="6589272" y="2928375"/>
-                  </a:lnTo>
-                  <a:lnTo>
-                    <a:pt x="6517649" y="2921568"/>
-                  </a:lnTo>
-                  <a:lnTo>
-                    <a:pt x="6446027" y="2914566"/>
-                  </a:lnTo>
-                  <a:lnTo>
-                    <a:pt x="6374404" y="2907366"/>
-                  </a:lnTo>
-                  <a:lnTo>
-                    <a:pt x="6302782" y="2899960"/>
-                  </a:lnTo>
-                  <a:lnTo>
-                    <a:pt x="6231159" y="2892343"/>
-                  </a:lnTo>
-                  <a:lnTo>
-                    <a:pt x="6159537" y="2884509"/>
-                  </a:lnTo>
-                  <a:lnTo>
-                    <a:pt x="6087914" y="2876452"/>
-                  </a:lnTo>
-                  <a:lnTo>
-                    <a:pt x="6016292" y="2868165"/>
-                  </a:lnTo>
-                  <a:lnTo>
-                    <a:pt x="5944669" y="2859643"/>
-                  </a:lnTo>
-                  <a:lnTo>
-                    <a:pt x="5873047" y="2850877"/>
-                  </a:lnTo>
-                  <a:lnTo>
-                    <a:pt x="5801424" y="2841862"/>
-                  </a:lnTo>
-                  <a:lnTo>
-                    <a:pt x="5729802" y="2832590"/>
-                  </a:lnTo>
-                  <a:lnTo>
-                    <a:pt x="5658179" y="2823054"/>
-                  </a:lnTo>
-                  <a:lnTo>
-                    <a:pt x="5586557" y="2813246"/>
-                  </a:lnTo>
-                  <a:lnTo>
-                    <a:pt x="5514934" y="2803158"/>
-                  </a:lnTo>
-                  <a:lnTo>
-                    <a:pt x="5443311" y="2792783"/>
-                  </a:lnTo>
-                  <a:lnTo>
-                    <a:pt x="5371689" y="2782113"/>
-                  </a:lnTo>
-                  <a:lnTo>
-                    <a:pt x="5300066" y="2771139"/>
-                  </a:lnTo>
-                  <a:lnTo>
-                    <a:pt x="5228444" y="2759852"/>
-                  </a:lnTo>
-                  <a:lnTo>
-                    <a:pt x="5156821" y="2748243"/>
-                  </a:lnTo>
-                  <a:lnTo>
-                    <a:pt x="5085199" y="2736304"/>
-                  </a:lnTo>
-                  <a:lnTo>
-                    <a:pt x="5013576" y="2724025"/>
-                  </a:lnTo>
-                  <a:lnTo>
-                    <a:pt x="4941954" y="2711395"/>
-                  </a:lnTo>
-                  <a:lnTo>
-                    <a:pt x="4870331" y="2698406"/>
-                  </a:lnTo>
-                  <a:lnTo>
-                    <a:pt x="4798709" y="2685047"/>
-                  </a:lnTo>
-                  <a:lnTo>
-                    <a:pt x="4727086" y="2671307"/>
-                  </a:lnTo>
-                  <a:lnTo>
-                    <a:pt x="4655464" y="2657176"/>
-                  </a:lnTo>
-                  <a:lnTo>
-                    <a:pt x="4583841" y="2642642"/>
-                  </a:lnTo>
-                  <a:lnTo>
-                    <a:pt x="4512219" y="2627695"/>
-                  </a:lnTo>
-                  <a:lnTo>
-                    <a:pt x="4440596" y="2612321"/>
-                  </a:lnTo>
-                  <a:lnTo>
-                    <a:pt x="4368974" y="2596509"/>
-                  </a:lnTo>
-                  <a:lnTo>
-                    <a:pt x="4297351" y="2580247"/>
-                  </a:lnTo>
-                  <a:lnTo>
-                    <a:pt x="4225729" y="2563521"/>
-                  </a:lnTo>
-                  <a:lnTo>
-                    <a:pt x="4154106" y="2546319"/>
-                  </a:lnTo>
-                  <a:lnTo>
-                    <a:pt x="4082483" y="2528627"/>
-                  </a:lnTo>
-                  <a:lnTo>
-                    <a:pt x="4010861" y="2510431"/>
-                  </a:lnTo>
-                  <a:lnTo>
-                    <a:pt x="3939238" y="2491717"/>
-                  </a:lnTo>
-                  <a:lnTo>
-                    <a:pt x="3867616" y="2472469"/>
-                  </a:lnTo>
-                  <a:lnTo>
-                    <a:pt x="3795993" y="2452673"/>
-                  </a:lnTo>
-                  <a:lnTo>
-                    <a:pt x="3724371" y="2432313"/>
-                  </a:lnTo>
-                  <a:lnTo>
-                    <a:pt x="3652748" y="2411373"/>
-                  </a:lnTo>
-                  <a:lnTo>
-                    <a:pt x="3581126" y="2389836"/>
-                  </a:lnTo>
-                  <a:lnTo>
-                    <a:pt x="3509503" y="2367686"/>
-                  </a:lnTo>
-                  <a:lnTo>
-                    <a:pt x="3437881" y="2344904"/>
-                  </a:lnTo>
-                  <a:lnTo>
-                    <a:pt x="3366258" y="2337387"/>
-                  </a:lnTo>
-                  <a:lnTo>
-                    <a:pt x="3294636" y="2336724"/>
-                  </a:lnTo>
-                  <a:lnTo>
-                    <a:pt x="3223013" y="2336060"/>
-                  </a:lnTo>
-                  <a:lnTo>
-                    <a:pt x="3151391" y="2335395"/>
-                  </a:lnTo>
-                  <a:lnTo>
-                    <a:pt x="3079768" y="2334730"/>
-                  </a:lnTo>
-                  <a:lnTo>
-                    <a:pt x="3008146" y="2334064"/>
-                  </a:lnTo>
-                  <a:lnTo>
-                    <a:pt x="2936523" y="2333398"/>
-                  </a:lnTo>
-                  <a:lnTo>
-                    <a:pt x="2864901" y="2332731"/>
-                  </a:lnTo>
-                  <a:lnTo>
-                    <a:pt x="2793278" y="2332064"/>
-                  </a:lnTo>
-                  <a:lnTo>
-                    <a:pt x="2721655" y="2331396"/>
-                  </a:lnTo>
-                  <a:lnTo>
-                    <a:pt x="2650033" y="2330728"/>
-                  </a:lnTo>
-                  <a:lnTo>
-                    <a:pt x="2578410" y="2330059"/>
-                  </a:lnTo>
-                  <a:lnTo>
-                    <a:pt x="2506788" y="2329390"/>
-                  </a:lnTo>
-                  <a:lnTo>
-                    <a:pt x="2435165" y="2328720"/>
-                  </a:lnTo>
-                  <a:lnTo>
-                    <a:pt x="2363543" y="2328049"/>
-                  </a:lnTo>
-                  <a:lnTo>
-                    <a:pt x="2291920" y="2327378"/>
-                  </a:lnTo>
-                  <a:lnTo>
-                    <a:pt x="2220298" y="2326707"/>
-                  </a:lnTo>
-                  <a:lnTo>
-                    <a:pt x="2148675" y="2326035"/>
-                  </a:lnTo>
-                  <a:lnTo>
-                    <a:pt x="2077053" y="2325362"/>
-                  </a:lnTo>
-                  <a:lnTo>
-                    <a:pt x="2005430" y="2324689"/>
-                  </a:lnTo>
-                  <a:lnTo>
-                    <a:pt x="1933808" y="2324015"/>
-                  </a:lnTo>
-                  <a:lnTo>
-                    <a:pt x="1862185" y="2323341"/>
-                  </a:lnTo>
-                  <a:lnTo>
-                    <a:pt x="1790563" y="2322666"/>
-                  </a:lnTo>
-                  <a:lnTo>
-                    <a:pt x="1718940" y="2321991"/>
-                  </a:lnTo>
-                  <a:lnTo>
-                    <a:pt x="1647318" y="2321315"/>
-                  </a:lnTo>
-                  <a:lnTo>
-                    <a:pt x="1575695" y="2320638"/>
-                  </a:lnTo>
-                  <a:lnTo>
-                    <a:pt x="1504073" y="2319961"/>
-                  </a:lnTo>
-                  <a:lnTo>
-                    <a:pt x="1432450" y="2319284"/>
-                  </a:lnTo>
-                  <a:lnTo>
-                    <a:pt x="1360827" y="2318606"/>
-                  </a:lnTo>
-                  <a:lnTo>
-                    <a:pt x="1289205" y="2317927"/>
-                  </a:lnTo>
-                  <a:lnTo>
-                    <a:pt x="1217582" y="2317248"/>
-                  </a:lnTo>
-                  <a:lnTo>
-                    <a:pt x="1145960" y="2316569"/>
-                  </a:lnTo>
-                  <a:lnTo>
-                    <a:pt x="1074337" y="2315888"/>
-                  </a:lnTo>
-                  <a:lnTo>
-                    <a:pt x="1002715" y="2315208"/>
-                  </a:lnTo>
-                  <a:lnTo>
-                    <a:pt x="931092" y="2314526"/>
-                  </a:lnTo>
-                  <a:lnTo>
-                    <a:pt x="859470" y="2313845"/>
-                  </a:lnTo>
-                  <a:lnTo>
-                    <a:pt x="787847" y="2313162"/>
-                  </a:lnTo>
-                  <a:lnTo>
-                    <a:pt x="716225" y="2312479"/>
-                  </a:lnTo>
-                  <a:lnTo>
-                    <a:pt x="644602" y="2311796"/>
-                  </a:lnTo>
-                  <a:lnTo>
-                    <a:pt x="572980" y="2311112"/>
-                  </a:lnTo>
-                  <a:lnTo>
-                    <a:pt x="501357" y="2310427"/>
-                  </a:lnTo>
-                  <a:lnTo>
-                    <a:pt x="429735" y="2309742"/>
-                  </a:lnTo>
-                  <a:lnTo>
-                    <a:pt x="358112" y="2309056"/>
-                  </a:lnTo>
-                  <a:lnTo>
-                    <a:pt x="286490" y="2308370"/>
-                  </a:lnTo>
-                  <a:lnTo>
-                    <a:pt x="214867" y="2307683"/>
-                  </a:lnTo>
-                  <a:lnTo>
-                    <a:pt x="143245" y="2306996"/>
-                  </a:lnTo>
-                  <a:lnTo>
-                    <a:pt x="71622" y="2306308"/>
-                  </a:lnTo>
-                  <a:lnTo>
-                    <a:pt x="0" y="2305620"/>
+                    <a:pt x="71622" y="88663"/>
+                  </a:lnTo>
+                  <a:lnTo>
+                    <a:pt x="143245" y="174860"/>
+                  </a:lnTo>
+                  <a:lnTo>
+                    <a:pt x="214867" y="258658"/>
+                  </a:lnTo>
+                  <a:lnTo>
+                    <a:pt x="286490" y="340124"/>
+                  </a:lnTo>
+                  <a:lnTo>
+                    <a:pt x="358112" y="419324"/>
+                  </a:lnTo>
+                  <a:lnTo>
+                    <a:pt x="429735" y="496321"/>
+                  </a:lnTo>
+                  <a:lnTo>
+                    <a:pt x="501357" y="571174"/>
+                  </a:lnTo>
+                  <a:lnTo>
+                    <a:pt x="572980" y="643945"/>
+                  </a:lnTo>
+                  <a:lnTo>
+                    <a:pt x="644602" y="714692"/>
+                  </a:lnTo>
+                  <a:lnTo>
+                    <a:pt x="716225" y="783469"/>
+                  </a:lnTo>
+                  <a:lnTo>
+                    <a:pt x="787847" y="850334"/>
+                  </a:lnTo>
+                  <a:lnTo>
+                    <a:pt x="859470" y="915337"/>
+                  </a:lnTo>
+                  <a:lnTo>
+                    <a:pt x="931092" y="978532"/>
+                  </a:lnTo>
+                  <a:lnTo>
+                    <a:pt x="1002715" y="1039969"/>
+                  </a:lnTo>
+                  <a:lnTo>
+                    <a:pt x="1074337" y="1099696"/>
+                  </a:lnTo>
+                  <a:lnTo>
+                    <a:pt x="1145960" y="1157761"/>
+                  </a:lnTo>
+                  <a:lnTo>
+                    <a:pt x="1217582" y="1214211"/>
+                  </a:lnTo>
+                  <a:lnTo>
+                    <a:pt x="1289205" y="1269090"/>
+                  </a:lnTo>
+                  <a:lnTo>
+                    <a:pt x="1360827" y="1322442"/>
+                  </a:lnTo>
+                  <a:lnTo>
+                    <a:pt x="1432450" y="1374310"/>
+                  </a:lnTo>
+                  <a:lnTo>
+                    <a:pt x="1504073" y="1424734"/>
+                  </a:lnTo>
+                  <a:lnTo>
+                    <a:pt x="1575695" y="1473756"/>
+                  </a:lnTo>
+                  <a:lnTo>
+                    <a:pt x="1647318" y="1521413"/>
+                  </a:lnTo>
+                  <a:lnTo>
+                    <a:pt x="1718940" y="1567744"/>
+                  </a:lnTo>
+                  <a:lnTo>
+                    <a:pt x="1790563" y="1612787"/>
+                  </a:lnTo>
+                  <a:lnTo>
+                    <a:pt x="1862185" y="1656576"/>
+                  </a:lnTo>
+                  <a:lnTo>
+                    <a:pt x="1933808" y="1699146"/>
+                  </a:lnTo>
+                  <a:lnTo>
+                    <a:pt x="2005430" y="1740532"/>
+                  </a:lnTo>
+                  <a:lnTo>
+                    <a:pt x="2077053" y="1780767"/>
+                  </a:lnTo>
+                  <a:lnTo>
+                    <a:pt x="2148675" y="1819882"/>
+                  </a:lnTo>
+                  <a:lnTo>
+                    <a:pt x="2220298" y="1857908"/>
+                  </a:lnTo>
+                  <a:lnTo>
+                    <a:pt x="2291920" y="1894877"/>
+                  </a:lnTo>
+                  <a:lnTo>
+                    <a:pt x="2363543" y="1930817"/>
+                  </a:lnTo>
+                  <a:lnTo>
+                    <a:pt x="2435165" y="1965757"/>
+                  </a:lnTo>
+                  <a:lnTo>
+                    <a:pt x="2506788" y="1999725"/>
+                  </a:lnTo>
+                  <a:lnTo>
+                    <a:pt x="2578410" y="2032748"/>
+                  </a:lnTo>
+                  <a:lnTo>
+                    <a:pt x="2650033" y="2064851"/>
+                  </a:lnTo>
+                  <a:lnTo>
+                    <a:pt x="2721655" y="2096062"/>
+                  </a:lnTo>
+                  <a:lnTo>
+                    <a:pt x="2793278" y="2126404"/>
+                  </a:lnTo>
+                  <a:lnTo>
+                    <a:pt x="2864901" y="2155902"/>
+                  </a:lnTo>
+                  <a:lnTo>
+                    <a:pt x="2936523" y="2184579"/>
+                  </a:lnTo>
+                  <a:lnTo>
+                    <a:pt x="3008146" y="2212459"/>
+                  </a:lnTo>
+                  <a:lnTo>
+                    <a:pt x="3079768" y="2239562"/>
+                  </a:lnTo>
+                  <a:lnTo>
+                    <a:pt x="3151391" y="2265911"/>
+                  </a:lnTo>
+                  <a:lnTo>
+                    <a:pt x="3223013" y="2291528"/>
+                  </a:lnTo>
+                  <a:lnTo>
+                    <a:pt x="3294636" y="2316431"/>
+                  </a:lnTo>
+                  <a:lnTo>
+                    <a:pt x="3366258" y="2340642"/>
+                  </a:lnTo>
+                  <a:lnTo>
+                    <a:pt x="3437881" y="2357312"/>
+                  </a:lnTo>
+                  <a:lnTo>
+                    <a:pt x="3509503" y="2358038"/>
+                  </a:lnTo>
+                  <a:lnTo>
+                    <a:pt x="3581126" y="2358763"/>
+                  </a:lnTo>
+                  <a:lnTo>
+                    <a:pt x="3652748" y="2359487"/>
+                  </a:lnTo>
+                  <a:lnTo>
+                    <a:pt x="3724371" y="2360210"/>
+                  </a:lnTo>
+                  <a:lnTo>
+                    <a:pt x="3795993" y="2360933"/>
+                  </a:lnTo>
+                  <a:lnTo>
+                    <a:pt x="3867616" y="2361655"/>
+                  </a:lnTo>
+                  <a:lnTo>
+                    <a:pt x="3939238" y="2362377"/>
+                  </a:lnTo>
+                  <a:lnTo>
+                    <a:pt x="4010861" y="2363098"/>
+                  </a:lnTo>
+                  <a:lnTo>
+                    <a:pt x="4082483" y="2363818"/>
+                  </a:lnTo>
+                  <a:lnTo>
+                    <a:pt x="4154106" y="2364538"/>
+                  </a:lnTo>
+                  <a:lnTo>
+                    <a:pt x="4225729" y="2365257"/>
+                  </a:lnTo>
+                  <a:lnTo>
+                    <a:pt x="4297351" y="2365975"/>
+                  </a:lnTo>
+                  <a:lnTo>
+                    <a:pt x="4368974" y="2366693"/>
+                  </a:lnTo>
+                  <a:lnTo>
+                    <a:pt x="4440596" y="2367410"/>
+                  </a:lnTo>
+                  <a:lnTo>
+                    <a:pt x="4512219" y="2368127"/>
+                  </a:lnTo>
+                  <a:lnTo>
+                    <a:pt x="4583841" y="2368843"/>
+                  </a:lnTo>
+                  <a:lnTo>
+                    <a:pt x="4655464" y="2369558"/>
+                  </a:lnTo>
+                  <a:lnTo>
+                    <a:pt x="4727086" y="2370273"/>
+                  </a:lnTo>
+                  <a:lnTo>
+                    <a:pt x="4798709" y="2370987"/>
+                  </a:lnTo>
+                  <a:lnTo>
+                    <a:pt x="4870331" y="2371700"/>
+                  </a:lnTo>
+                  <a:lnTo>
+                    <a:pt x="4941954" y="2372413"/>
+                  </a:lnTo>
+                  <a:lnTo>
+                    <a:pt x="5013576" y="2373125"/>
+                  </a:lnTo>
+                  <a:lnTo>
+                    <a:pt x="5085199" y="2373837"/>
+                  </a:lnTo>
+                  <a:lnTo>
+                    <a:pt x="5156821" y="2374548"/>
+                  </a:lnTo>
+                  <a:lnTo>
+                    <a:pt x="5228444" y="2375258"/>
+                  </a:lnTo>
+                  <a:lnTo>
+                    <a:pt x="5300066" y="2375968"/>
+                  </a:lnTo>
+                  <a:lnTo>
+                    <a:pt x="5371689" y="2376677"/>
+                  </a:lnTo>
+                  <a:lnTo>
+                    <a:pt x="5443311" y="2377386"/>
+                  </a:lnTo>
+                  <a:lnTo>
+                    <a:pt x="5514934" y="2378093"/>
+                  </a:lnTo>
+                  <a:lnTo>
+                    <a:pt x="5586557" y="2378801"/>
+                  </a:lnTo>
+                  <a:lnTo>
+                    <a:pt x="5658179" y="2379507"/>
+                  </a:lnTo>
+                  <a:lnTo>
+                    <a:pt x="5729802" y="2380213"/>
+                  </a:lnTo>
+                  <a:lnTo>
+                    <a:pt x="5801424" y="2380919"/>
+                  </a:lnTo>
+                  <a:lnTo>
+                    <a:pt x="5873047" y="2381623"/>
+                  </a:lnTo>
+                  <a:lnTo>
+                    <a:pt x="5944669" y="2382327"/>
+                  </a:lnTo>
+                  <a:lnTo>
+                    <a:pt x="6016292" y="2383031"/>
+                  </a:lnTo>
+                  <a:lnTo>
+                    <a:pt x="6087914" y="2383734"/>
+                  </a:lnTo>
+                  <a:lnTo>
+                    <a:pt x="6159537" y="2384436"/>
+                  </a:lnTo>
+                  <a:lnTo>
+                    <a:pt x="6231159" y="2385138"/>
+                  </a:lnTo>
+                  <a:lnTo>
+                    <a:pt x="6302782" y="2385839"/>
+                  </a:lnTo>
+                  <a:lnTo>
+                    <a:pt x="6374404" y="2386539"/>
+                  </a:lnTo>
+                  <a:lnTo>
+                    <a:pt x="6446027" y="2387239"/>
+                  </a:lnTo>
+                  <a:lnTo>
+                    <a:pt x="6517649" y="2387938"/>
+                  </a:lnTo>
+                  <a:lnTo>
+                    <a:pt x="6589272" y="2388637"/>
+                  </a:lnTo>
+                  <a:lnTo>
+                    <a:pt x="6660894" y="2389335"/>
+                  </a:lnTo>
+                  <a:lnTo>
+                    <a:pt x="6732517" y="2390032"/>
+                  </a:lnTo>
+                  <a:lnTo>
+                    <a:pt x="6804139" y="2390729"/>
+                  </a:lnTo>
+                  <a:lnTo>
+                    <a:pt x="6875762" y="2391425"/>
+                  </a:lnTo>
+                  <a:lnTo>
+                    <a:pt x="6947385" y="2392121"/>
+                  </a:lnTo>
+                  <a:lnTo>
+                    <a:pt x="7019007" y="2392816"/>
+                  </a:lnTo>
+                  <a:lnTo>
+                    <a:pt x="7090630" y="2393510"/>
+                  </a:lnTo>
+                  <a:lnTo>
+                    <a:pt x="7090630" y="2991546"/>
+                  </a:lnTo>
+                  <a:lnTo>
+                    <a:pt x="7019007" y="2985965"/>
+                  </a:lnTo>
+                  <a:lnTo>
+                    <a:pt x="6947385" y="2980224"/>
+                  </a:lnTo>
+                  <a:lnTo>
+                    <a:pt x="6875762" y="2974319"/>
+                  </a:lnTo>
+                  <a:lnTo>
+                    <a:pt x="6804139" y="2968244"/>
+                  </a:lnTo>
+                  <a:lnTo>
+                    <a:pt x="6732517" y="2961996"/>
+                  </a:lnTo>
+                  <a:lnTo>
+                    <a:pt x="6660894" y="2955569"/>
+                  </a:lnTo>
+                  <a:lnTo>
+                    <a:pt x="6589272" y="2948958"/>
+                  </a:lnTo>
+                  <a:lnTo>
+                    <a:pt x="6517649" y="2942158"/>
+                  </a:lnTo>
+                  <a:lnTo>
+                    <a:pt x="6446027" y="2935163"/>
+                  </a:lnTo>
+                  <a:lnTo>
+                    <a:pt x="6374404" y="2927968"/>
+                  </a:lnTo>
+                  <a:lnTo>
+                    <a:pt x="6302782" y="2920567"/>
+                  </a:lnTo>
+                  <a:lnTo>
+                    <a:pt x="6231159" y="2912955"/>
+                  </a:lnTo>
+                  <a:lnTo>
+                    <a:pt x="6159537" y="2905124"/>
+                  </a:lnTo>
+                  <a:lnTo>
+                    <a:pt x="6087914" y="2897069"/>
+                  </a:lnTo>
+                  <a:lnTo>
+                    <a:pt x="6016292" y="2888784"/>
+                  </a:lnTo>
+                  <a:lnTo>
+                    <a:pt x="5944669" y="2880262"/>
+                  </a:lnTo>
+                  <a:lnTo>
+                    <a:pt x="5873047" y="2871495"/>
+                  </a:lnTo>
+                  <a:lnTo>
+                    <a:pt x="5801424" y="2862478"/>
+                  </a:lnTo>
+                  <a:lnTo>
+                    <a:pt x="5729802" y="2853203"/>
+                  </a:lnTo>
+                  <a:lnTo>
+                    <a:pt x="5658179" y="2843662"/>
+                  </a:lnTo>
+                  <a:lnTo>
+                    <a:pt x="5586557" y="2833848"/>
+                  </a:lnTo>
+                  <a:lnTo>
+                    <a:pt x="5514934" y="2823754"/>
+                  </a:lnTo>
+                  <a:lnTo>
+                    <a:pt x="5443311" y="2813370"/>
+                  </a:lnTo>
+                  <a:lnTo>
+                    <a:pt x="5371689" y="2802689"/>
+                  </a:lnTo>
+                  <a:lnTo>
+                    <a:pt x="5300066" y="2791703"/>
+                  </a:lnTo>
+                  <a:lnTo>
+                    <a:pt x="5228444" y="2780402"/>
+                  </a:lnTo>
+                  <a:lnTo>
+                    <a:pt x="5156821" y="2768777"/>
+                  </a:lnTo>
+                  <a:lnTo>
+                    <a:pt x="5085199" y="2756820"/>
+                  </a:lnTo>
+                  <a:lnTo>
+                    <a:pt x="5013576" y="2744521"/>
+                  </a:lnTo>
+                  <a:lnTo>
+                    <a:pt x="4941954" y="2731870"/>
+                  </a:lnTo>
+                  <a:lnTo>
+                    <a:pt x="4870331" y="2718856"/>
+                  </a:lnTo>
+                  <a:lnTo>
+                    <a:pt x="4798709" y="2705471"/>
+                  </a:lnTo>
+                  <a:lnTo>
+                    <a:pt x="4727086" y="2691702"/>
+                  </a:lnTo>
+                  <a:lnTo>
+                    <a:pt x="4655464" y="2677539"/>
+                  </a:lnTo>
+                  <a:lnTo>
+                    <a:pt x="4583841" y="2662970"/>
+                  </a:lnTo>
+                  <a:lnTo>
+                    <a:pt x="4512219" y="2647985"/>
+                  </a:lnTo>
+                  <a:lnTo>
+                    <a:pt x="4440596" y="2632571"/>
+                  </a:lnTo>
+                  <a:lnTo>
+                    <a:pt x="4368974" y="2616715"/>
+                  </a:lnTo>
+                  <a:lnTo>
+                    <a:pt x="4297351" y="2600406"/>
+                  </a:lnTo>
+                  <a:lnTo>
+                    <a:pt x="4225729" y="2583630"/>
+                  </a:lnTo>
+                  <a:lnTo>
+                    <a:pt x="4154106" y="2566374"/>
+                  </a:lnTo>
+                  <a:lnTo>
+                    <a:pt x="4082483" y="2548624"/>
+                  </a:lnTo>
+                  <a:lnTo>
+                    <a:pt x="4010861" y="2530366"/>
+                  </a:lnTo>
+                  <a:lnTo>
+                    <a:pt x="3939238" y="2511586"/>
+                  </a:lnTo>
+                  <a:lnTo>
+                    <a:pt x="3867616" y="2492268"/>
+                  </a:lnTo>
+                  <a:lnTo>
+                    <a:pt x="3795993" y="2472397"/>
+                  </a:lnTo>
+                  <a:lnTo>
+                    <a:pt x="3724371" y="2451957"/>
+                  </a:lnTo>
+                  <a:lnTo>
+                    <a:pt x="3652748" y="2430932"/>
+                  </a:lnTo>
+                  <a:lnTo>
+                    <a:pt x="3581126" y="2409306"/>
+                  </a:lnTo>
+                  <a:lnTo>
+                    <a:pt x="3509503" y="2387061"/>
+                  </a:lnTo>
+                  <a:lnTo>
+                    <a:pt x="3437881" y="2364179"/>
+                  </a:lnTo>
+                  <a:lnTo>
+                    <a:pt x="3366258" y="2356586"/>
+                  </a:lnTo>
+                  <a:lnTo>
+                    <a:pt x="3294636" y="2355860"/>
+                  </a:lnTo>
+                  <a:lnTo>
+                    <a:pt x="3223013" y="2355132"/>
+                  </a:lnTo>
+                  <a:lnTo>
+                    <a:pt x="3151391" y="2354404"/>
+                  </a:lnTo>
+                  <a:lnTo>
+                    <a:pt x="3079768" y="2353676"/>
+                  </a:lnTo>
+                  <a:lnTo>
+                    <a:pt x="3008146" y="2352947"/>
+                  </a:lnTo>
+                  <a:lnTo>
+                    <a:pt x="2936523" y="2352217"/>
+                  </a:lnTo>
+                  <a:lnTo>
+                    <a:pt x="2864901" y="2351486"/>
+                  </a:lnTo>
+                  <a:lnTo>
+                    <a:pt x="2793278" y="2350755"/>
+                  </a:lnTo>
+                  <a:lnTo>
+                    <a:pt x="2721655" y="2350023"/>
+                  </a:lnTo>
+                  <a:lnTo>
+                    <a:pt x="2650033" y="2349291"/>
+                  </a:lnTo>
+                  <a:lnTo>
+                    <a:pt x="2578410" y="2348558"/>
+                  </a:lnTo>
+                  <a:lnTo>
+                    <a:pt x="2506788" y="2347824"/>
+                  </a:lnTo>
+                  <a:lnTo>
+                    <a:pt x="2435165" y="2347090"/>
+                  </a:lnTo>
+                  <a:lnTo>
+                    <a:pt x="2363543" y="2346355"/>
+                  </a:lnTo>
+                  <a:lnTo>
+                    <a:pt x="2291920" y="2345619"/>
+                  </a:lnTo>
+                  <a:lnTo>
+                    <a:pt x="2220298" y="2344883"/>
+                  </a:lnTo>
+                  <a:lnTo>
+                    <a:pt x="2148675" y="2344146"/>
+                  </a:lnTo>
+                  <a:lnTo>
+                    <a:pt x="2077053" y="2343408"/>
+                  </a:lnTo>
+                  <a:lnTo>
+                    <a:pt x="2005430" y="2342670"/>
+                  </a:lnTo>
+                  <a:lnTo>
+                    <a:pt x="1933808" y="2341931"/>
+                  </a:lnTo>
+                  <a:lnTo>
+                    <a:pt x="1862185" y="2341192"/>
+                  </a:lnTo>
+                  <a:lnTo>
+                    <a:pt x="1790563" y="2340452"/>
+                  </a:lnTo>
+                  <a:lnTo>
+                    <a:pt x="1718940" y="2339711"/>
+                  </a:lnTo>
+                  <a:lnTo>
+                    <a:pt x="1647318" y="2338970"/>
+                  </a:lnTo>
+                  <a:lnTo>
+                    <a:pt x="1575695" y="2338227"/>
+                  </a:lnTo>
+                  <a:lnTo>
+                    <a:pt x="1504073" y="2337485"/>
+                  </a:lnTo>
+                  <a:lnTo>
+                    <a:pt x="1432450" y="2336741"/>
+                  </a:lnTo>
+                  <a:lnTo>
+                    <a:pt x="1360827" y="2335997"/>
+                  </a:lnTo>
+                  <a:lnTo>
+                    <a:pt x="1289205" y="2335253"/>
+                  </a:lnTo>
+                  <a:lnTo>
+                    <a:pt x="1217582" y="2334507"/>
+                  </a:lnTo>
+                  <a:lnTo>
+                    <a:pt x="1145960" y="2333761"/>
+                  </a:lnTo>
+                  <a:lnTo>
+                    <a:pt x="1074337" y="2333015"/>
+                  </a:lnTo>
+                  <a:lnTo>
+                    <a:pt x="1002715" y="2332267"/>
+                  </a:lnTo>
+                  <a:lnTo>
+                    <a:pt x="931092" y="2331519"/>
+                  </a:lnTo>
+                  <a:lnTo>
+                    <a:pt x="859470" y="2330771"/>
+                  </a:lnTo>
+                  <a:lnTo>
+                    <a:pt x="787847" y="2330021"/>
+                  </a:lnTo>
+                  <a:lnTo>
+                    <a:pt x="716225" y="2329271"/>
+                  </a:lnTo>
+                  <a:lnTo>
+                    <a:pt x="644602" y="2328521"/>
+                  </a:lnTo>
+                  <a:lnTo>
+                    <a:pt x="572980" y="2327770"/>
+                  </a:lnTo>
+                  <a:lnTo>
+                    <a:pt x="501357" y="2327018"/>
+                  </a:lnTo>
+                  <a:lnTo>
+                    <a:pt x="429735" y="2326265"/>
+                  </a:lnTo>
+                  <a:lnTo>
+                    <a:pt x="358112" y="2325512"/>
+                  </a:lnTo>
+                  <a:lnTo>
+                    <a:pt x="286490" y="2324758"/>
+                  </a:lnTo>
+                  <a:lnTo>
+                    <a:pt x="214867" y="2324004"/>
+                  </a:lnTo>
+                  <a:lnTo>
+                    <a:pt x="143245" y="2323248"/>
+                  </a:lnTo>
+                  <a:lnTo>
+                    <a:pt x="71622" y="2322492"/>
+                  </a:lnTo>
+                  <a:lnTo>
+                    <a:pt x="0" y="2321736"/>
                   </a:lnTo>
                   <a:close/>
                 </a:path>
@@ -4063,312 +4063,312 @@
           </p:nvSpPr>
           <p:spPr>
             <a:xfrm>
-              <a:off x="1172049" y="2389936"/>
-              <a:ext cx="7090630" cy="2371172"/>
+              <a:off x="1172049" y="2370694"/>
+              <a:ext cx="7090630" cy="2393510"/>
             </a:xfrm>
             <a:custGeom>
               <a:avLst/>
               <a:pathLst>
-                <a:path w="7090630" h="2371172">
+                <a:path w="7090630" h="2393510">
                   <a:moveTo>
                     <a:pt x="0" y="0"/>
                   </a:moveTo>
                   <a:lnTo>
-                    <a:pt x="71622" y="87737"/>
-                  </a:lnTo>
-                  <a:lnTo>
-                    <a:pt x="143245" y="173043"/>
-                  </a:lnTo>
-                  <a:lnTo>
-                    <a:pt x="214867" y="255987"/>
-                  </a:lnTo>
-                  <a:lnTo>
-                    <a:pt x="286490" y="336633"/>
-                  </a:lnTo>
-                  <a:lnTo>
-                    <a:pt x="358112" y="415045"/>
-                  </a:lnTo>
-                  <a:lnTo>
-                    <a:pt x="429735" y="491285"/>
-                  </a:lnTo>
-                  <a:lnTo>
-                    <a:pt x="501357" y="565413"/>
-                  </a:lnTo>
-                  <a:lnTo>
-                    <a:pt x="572980" y="637488"/>
-                  </a:lnTo>
-                  <a:lnTo>
-                    <a:pt x="644602" y="707566"/>
-                  </a:lnTo>
-                  <a:lnTo>
-                    <a:pt x="716225" y="775703"/>
-                  </a:lnTo>
-                  <a:lnTo>
-                    <a:pt x="787847" y="841953"/>
-                  </a:lnTo>
-                  <a:lnTo>
-                    <a:pt x="859470" y="906367"/>
-                  </a:lnTo>
-                  <a:lnTo>
-                    <a:pt x="931092" y="968997"/>
-                  </a:lnTo>
-                  <a:lnTo>
-                    <a:pt x="1002715" y="1029892"/>
-                  </a:lnTo>
-                  <a:lnTo>
-                    <a:pt x="1074337" y="1089100"/>
-                  </a:lnTo>
-                  <a:lnTo>
-                    <a:pt x="1145960" y="1146668"/>
-                  </a:lnTo>
-                  <a:lnTo>
-                    <a:pt x="1217582" y="1202642"/>
-                  </a:lnTo>
-                  <a:lnTo>
-                    <a:pt x="1289205" y="1257065"/>
-                  </a:lnTo>
-                  <a:lnTo>
-                    <a:pt x="1360827" y="1309980"/>
-                  </a:lnTo>
-                  <a:lnTo>
-                    <a:pt x="1432450" y="1361430"/>
-                  </a:lnTo>
-                  <a:lnTo>
-                    <a:pt x="1504073" y="1411454"/>
-                  </a:lnTo>
-                  <a:lnTo>
-                    <a:pt x="1575695" y="1460093"/>
-                  </a:lnTo>
-                  <a:lnTo>
-                    <a:pt x="1647318" y="1507384"/>
-                  </a:lnTo>
-                  <a:lnTo>
-                    <a:pt x="1718940" y="1553366"/>
-                  </a:lnTo>
-                  <a:lnTo>
-                    <a:pt x="1790563" y="1598073"/>
-                  </a:lnTo>
-                  <a:lnTo>
-                    <a:pt x="1862185" y="1641542"/>
-                  </a:lnTo>
-                  <a:lnTo>
-                    <a:pt x="1933808" y="1683807"/>
-                  </a:lnTo>
-                  <a:lnTo>
-                    <a:pt x="2005430" y="1724902"/>
-                  </a:lnTo>
-                  <a:lnTo>
-                    <a:pt x="2077053" y="1764858"/>
-                  </a:lnTo>
-                  <a:lnTo>
-                    <a:pt x="2148675" y="1803707"/>
-                  </a:lnTo>
-                  <a:lnTo>
-                    <a:pt x="2220298" y="1841480"/>
-                  </a:lnTo>
-                  <a:lnTo>
-                    <a:pt x="2291920" y="1878206"/>
-                  </a:lnTo>
-                  <a:lnTo>
-                    <a:pt x="2363543" y="1913916"/>
-                  </a:lnTo>
-                  <a:lnTo>
-                    <a:pt x="2435165" y="1948636"/>
-                  </a:lnTo>
-                  <a:lnTo>
-                    <a:pt x="2506788" y="1982394"/>
-                  </a:lnTo>
-                  <a:lnTo>
-                    <a:pt x="2578410" y="2015217"/>
-                  </a:lnTo>
-                  <a:lnTo>
-                    <a:pt x="2650033" y="2047131"/>
-                  </a:lnTo>
-                  <a:lnTo>
-                    <a:pt x="2721655" y="2078161"/>
-                  </a:lnTo>
-                  <a:lnTo>
-                    <a:pt x="2793278" y="2108332"/>
-                  </a:lnTo>
-                  <a:lnTo>
-                    <a:pt x="2864901" y="2137666"/>
-                  </a:lnTo>
-                  <a:lnTo>
-                    <a:pt x="2936523" y="2166188"/>
-                  </a:lnTo>
-                  <a:lnTo>
-                    <a:pt x="3008146" y="2193920"/>
-                  </a:lnTo>
-                  <a:lnTo>
-                    <a:pt x="3079768" y="2220884"/>
-                  </a:lnTo>
-                  <a:lnTo>
-                    <a:pt x="3151391" y="2247101"/>
-                  </a:lnTo>
-                  <a:lnTo>
-                    <a:pt x="3223013" y="2272591"/>
-                  </a:lnTo>
-                  <a:lnTo>
-                    <a:pt x="3294636" y="2297376"/>
-                  </a:lnTo>
-                  <a:lnTo>
-                    <a:pt x="3366258" y="2321474"/>
-                  </a:lnTo>
-                  <a:lnTo>
-                    <a:pt x="3437881" y="2338051"/>
-                  </a:lnTo>
-                  <a:lnTo>
-                    <a:pt x="3509503" y="2338713"/>
-                  </a:lnTo>
-                  <a:lnTo>
-                    <a:pt x="3581126" y="2339375"/>
-                  </a:lnTo>
-                  <a:lnTo>
-                    <a:pt x="3652748" y="2340036"/>
-                  </a:lnTo>
-                  <a:lnTo>
-                    <a:pt x="3724371" y="2340697"/>
-                  </a:lnTo>
-                  <a:lnTo>
-                    <a:pt x="3795993" y="2341358"/>
-                  </a:lnTo>
-                  <a:lnTo>
-                    <a:pt x="3867616" y="2342018"/>
-                  </a:lnTo>
-                  <a:lnTo>
-                    <a:pt x="3939238" y="2342677"/>
-                  </a:lnTo>
-                  <a:lnTo>
-                    <a:pt x="4010861" y="2343336"/>
-                  </a:lnTo>
-                  <a:lnTo>
-                    <a:pt x="4082483" y="2343994"/>
-                  </a:lnTo>
-                  <a:lnTo>
-                    <a:pt x="4154106" y="2344652"/>
-                  </a:lnTo>
-                  <a:lnTo>
-                    <a:pt x="4225729" y="2345309"/>
-                  </a:lnTo>
-                  <a:lnTo>
-                    <a:pt x="4297351" y="2345966"/>
-                  </a:lnTo>
-                  <a:lnTo>
-                    <a:pt x="4368974" y="2346622"/>
-                  </a:lnTo>
-                  <a:lnTo>
-                    <a:pt x="4440596" y="2347277"/>
-                  </a:lnTo>
-                  <a:lnTo>
-                    <a:pt x="4512219" y="2347933"/>
-                  </a:lnTo>
-                  <a:lnTo>
-                    <a:pt x="4583841" y="2348587"/>
-                  </a:lnTo>
-                  <a:lnTo>
-                    <a:pt x="4655464" y="2349241"/>
-                  </a:lnTo>
-                  <a:lnTo>
-                    <a:pt x="4727086" y="2349895"/>
-                  </a:lnTo>
-                  <a:lnTo>
-                    <a:pt x="4798709" y="2350548"/>
-                  </a:lnTo>
-                  <a:lnTo>
-                    <a:pt x="4870331" y="2351200"/>
-                  </a:lnTo>
-                  <a:lnTo>
-                    <a:pt x="4941954" y="2351852"/>
-                  </a:lnTo>
-                  <a:lnTo>
-                    <a:pt x="5013576" y="2352504"/>
-                  </a:lnTo>
-                  <a:lnTo>
-                    <a:pt x="5085199" y="2353155"/>
-                  </a:lnTo>
-                  <a:lnTo>
-                    <a:pt x="5156821" y="2353805"/>
-                  </a:lnTo>
-                  <a:lnTo>
-                    <a:pt x="5228444" y="2354455"/>
-                  </a:lnTo>
-                  <a:lnTo>
-                    <a:pt x="5300066" y="2355105"/>
-                  </a:lnTo>
-                  <a:lnTo>
-                    <a:pt x="5371689" y="2355753"/>
-                  </a:lnTo>
-                  <a:lnTo>
-                    <a:pt x="5443311" y="2356402"/>
-                  </a:lnTo>
-                  <a:lnTo>
-                    <a:pt x="5514934" y="2357050"/>
-                  </a:lnTo>
-                  <a:lnTo>
-                    <a:pt x="5586557" y="2357697"/>
-                  </a:lnTo>
-                  <a:lnTo>
-                    <a:pt x="5658179" y="2358344"/>
-                  </a:lnTo>
-                  <a:lnTo>
-                    <a:pt x="5729802" y="2358990"/>
-                  </a:lnTo>
-                  <a:lnTo>
-                    <a:pt x="5801424" y="2359636"/>
-                  </a:lnTo>
-                  <a:lnTo>
-                    <a:pt x="5873047" y="2360281"/>
-                  </a:lnTo>
-                  <a:lnTo>
-                    <a:pt x="5944669" y="2360926"/>
-                  </a:lnTo>
-                  <a:lnTo>
-                    <a:pt x="6016292" y="2361570"/>
-                  </a:lnTo>
-                  <a:lnTo>
-                    <a:pt x="6087914" y="2362214"/>
-                  </a:lnTo>
-                  <a:lnTo>
-                    <a:pt x="6159537" y="2362857"/>
-                  </a:lnTo>
-                  <a:lnTo>
-                    <a:pt x="6231159" y="2363500"/>
-                  </a:lnTo>
-                  <a:lnTo>
-                    <a:pt x="6302782" y="2364142"/>
-                  </a:lnTo>
-                  <a:lnTo>
-                    <a:pt x="6374404" y="2364783"/>
-                  </a:lnTo>
-                  <a:lnTo>
-                    <a:pt x="6446027" y="2365425"/>
-                  </a:lnTo>
-                  <a:lnTo>
-                    <a:pt x="6517649" y="2366065"/>
-                  </a:lnTo>
-                  <a:lnTo>
-                    <a:pt x="6589272" y="2366705"/>
-                  </a:lnTo>
-                  <a:lnTo>
-                    <a:pt x="6660894" y="2367345"/>
-                  </a:lnTo>
-                  <a:lnTo>
-                    <a:pt x="6732517" y="2367984"/>
-                  </a:lnTo>
-                  <a:lnTo>
-                    <a:pt x="6804139" y="2368623"/>
-                  </a:lnTo>
-                  <a:lnTo>
-                    <a:pt x="6875762" y="2369261"/>
-                  </a:lnTo>
-                  <a:lnTo>
-                    <a:pt x="6947385" y="2369898"/>
-                  </a:lnTo>
-                  <a:lnTo>
-                    <a:pt x="7019007" y="2370535"/>
-                  </a:lnTo>
-                  <a:lnTo>
-                    <a:pt x="7090630" y="2371172"/>
+                    <a:pt x="71622" y="88663"/>
+                  </a:lnTo>
+                  <a:lnTo>
+                    <a:pt x="143245" y="174860"/>
+                  </a:lnTo>
+                  <a:lnTo>
+                    <a:pt x="214867" y="258658"/>
+                  </a:lnTo>
+                  <a:lnTo>
+                    <a:pt x="286490" y="340124"/>
+                  </a:lnTo>
+                  <a:lnTo>
+                    <a:pt x="358112" y="419324"/>
+                  </a:lnTo>
+                  <a:lnTo>
+                    <a:pt x="429735" y="496321"/>
+                  </a:lnTo>
+                  <a:lnTo>
+                    <a:pt x="501357" y="571174"/>
+                  </a:lnTo>
+                  <a:lnTo>
+                    <a:pt x="572980" y="643945"/>
+                  </a:lnTo>
+                  <a:lnTo>
+                    <a:pt x="644602" y="714692"/>
+                  </a:lnTo>
+                  <a:lnTo>
+                    <a:pt x="716225" y="783469"/>
+                  </a:lnTo>
+                  <a:lnTo>
+                    <a:pt x="787847" y="850334"/>
+                  </a:lnTo>
+                  <a:lnTo>
+                    <a:pt x="859470" y="915337"/>
+                  </a:lnTo>
+                  <a:lnTo>
+                    <a:pt x="931092" y="978532"/>
+                  </a:lnTo>
+                  <a:lnTo>
+                    <a:pt x="1002715" y="1039969"/>
+                  </a:lnTo>
+                  <a:lnTo>
+                    <a:pt x="1074337" y="1099696"/>
+                  </a:lnTo>
+                  <a:lnTo>
+                    <a:pt x="1145960" y="1157761"/>
+                  </a:lnTo>
+                  <a:lnTo>
+                    <a:pt x="1217582" y="1214211"/>
+                  </a:lnTo>
+                  <a:lnTo>
+                    <a:pt x="1289205" y="1269090"/>
+                  </a:lnTo>
+                  <a:lnTo>
+                    <a:pt x="1360827" y="1322442"/>
+                  </a:lnTo>
+                  <a:lnTo>
+                    <a:pt x="1432450" y="1374310"/>
+                  </a:lnTo>
+                  <a:lnTo>
+                    <a:pt x="1504073" y="1424734"/>
+                  </a:lnTo>
+                  <a:lnTo>
+                    <a:pt x="1575695" y="1473756"/>
+                  </a:lnTo>
+                  <a:lnTo>
+                    <a:pt x="1647318" y="1521413"/>
+                  </a:lnTo>
+                  <a:lnTo>
+                    <a:pt x="1718940" y="1567744"/>
+                  </a:lnTo>
+                  <a:lnTo>
+                    <a:pt x="1790563" y="1612787"/>
+                  </a:lnTo>
+                  <a:lnTo>
+                    <a:pt x="1862185" y="1656576"/>
+                  </a:lnTo>
+                  <a:lnTo>
+                    <a:pt x="1933808" y="1699146"/>
+                  </a:lnTo>
+                  <a:lnTo>
+                    <a:pt x="2005430" y="1740532"/>
+                  </a:lnTo>
+                  <a:lnTo>
+                    <a:pt x="2077053" y="1780767"/>
+                  </a:lnTo>
+                  <a:lnTo>
+                    <a:pt x="2148675" y="1819882"/>
+                  </a:lnTo>
+                  <a:lnTo>
+                    <a:pt x="2220298" y="1857908"/>
+                  </a:lnTo>
+                  <a:lnTo>
+                    <a:pt x="2291920" y="1894877"/>
+                  </a:lnTo>
+                  <a:lnTo>
+                    <a:pt x="2363543" y="1930817"/>
+                  </a:lnTo>
+                  <a:lnTo>
+                    <a:pt x="2435165" y="1965757"/>
+                  </a:lnTo>
+                  <a:lnTo>
+                    <a:pt x="2506788" y="1999725"/>
+                  </a:lnTo>
+                  <a:lnTo>
+                    <a:pt x="2578410" y="2032748"/>
+                  </a:lnTo>
+                  <a:lnTo>
+                    <a:pt x="2650033" y="2064851"/>
+                  </a:lnTo>
+                  <a:lnTo>
+                    <a:pt x="2721655" y="2096062"/>
+                  </a:lnTo>
+                  <a:lnTo>
+                    <a:pt x="2793278" y="2126404"/>
+                  </a:lnTo>
+                  <a:lnTo>
+                    <a:pt x="2864901" y="2155902"/>
+                  </a:lnTo>
+                  <a:lnTo>
+                    <a:pt x="2936523" y="2184579"/>
+                  </a:lnTo>
+                  <a:lnTo>
+                    <a:pt x="3008146" y="2212459"/>
+                  </a:lnTo>
+                  <a:lnTo>
+                    <a:pt x="3079768" y="2239562"/>
+                  </a:lnTo>
+                  <a:lnTo>
+                    <a:pt x="3151391" y="2265911"/>
+                  </a:lnTo>
+                  <a:lnTo>
+                    <a:pt x="3223013" y="2291528"/>
+                  </a:lnTo>
+                  <a:lnTo>
+                    <a:pt x="3294636" y="2316431"/>
+                  </a:lnTo>
+                  <a:lnTo>
+                    <a:pt x="3366258" y="2340642"/>
+                  </a:lnTo>
+                  <a:lnTo>
+                    <a:pt x="3437881" y="2357312"/>
+                  </a:lnTo>
+                  <a:lnTo>
+                    <a:pt x="3509503" y="2358038"/>
+                  </a:lnTo>
+                  <a:lnTo>
+                    <a:pt x="3581126" y="2358763"/>
+                  </a:lnTo>
+                  <a:lnTo>
+                    <a:pt x="3652748" y="2359487"/>
+                  </a:lnTo>
+                  <a:lnTo>
+                    <a:pt x="3724371" y="2360210"/>
+                  </a:lnTo>
+                  <a:lnTo>
+                    <a:pt x="3795993" y="2360933"/>
+                  </a:lnTo>
+                  <a:lnTo>
+                    <a:pt x="3867616" y="2361655"/>
+                  </a:lnTo>
+                  <a:lnTo>
+                    <a:pt x="3939238" y="2362377"/>
+                  </a:lnTo>
+                  <a:lnTo>
+                    <a:pt x="4010861" y="2363098"/>
+                  </a:lnTo>
+                  <a:lnTo>
+                    <a:pt x="4082483" y="2363818"/>
+                  </a:lnTo>
+                  <a:lnTo>
+                    <a:pt x="4154106" y="2364538"/>
+                  </a:lnTo>
+                  <a:lnTo>
+                    <a:pt x="4225729" y="2365257"/>
+                  </a:lnTo>
+                  <a:lnTo>
+                    <a:pt x="4297351" y="2365975"/>
+                  </a:lnTo>
+                  <a:lnTo>
+                    <a:pt x="4368974" y="2366693"/>
+                  </a:lnTo>
+                  <a:lnTo>
+                    <a:pt x="4440596" y="2367410"/>
+                  </a:lnTo>
+                  <a:lnTo>
+                    <a:pt x="4512219" y="2368127"/>
+                  </a:lnTo>
+                  <a:lnTo>
+                    <a:pt x="4583841" y="2368843"/>
+                  </a:lnTo>
+                  <a:lnTo>
+                    <a:pt x="4655464" y="2369558"/>
+                  </a:lnTo>
+                  <a:lnTo>
+                    <a:pt x="4727086" y="2370273"/>
+                  </a:lnTo>
+                  <a:lnTo>
+                    <a:pt x="4798709" y="2370987"/>
+                  </a:lnTo>
+                  <a:lnTo>
+                    <a:pt x="4870331" y="2371700"/>
+                  </a:lnTo>
+                  <a:lnTo>
+                    <a:pt x="4941954" y="2372413"/>
+                  </a:lnTo>
+                  <a:lnTo>
+                    <a:pt x="5013576" y="2373125"/>
+                  </a:lnTo>
+                  <a:lnTo>
+                    <a:pt x="5085199" y="2373837"/>
+                  </a:lnTo>
+                  <a:lnTo>
+                    <a:pt x="5156821" y="2374548"/>
+                  </a:lnTo>
+                  <a:lnTo>
+                    <a:pt x="5228444" y="2375258"/>
+                  </a:lnTo>
+                  <a:lnTo>
+                    <a:pt x="5300066" y="2375968"/>
+                  </a:lnTo>
+                  <a:lnTo>
+                    <a:pt x="5371689" y="2376677"/>
+                  </a:lnTo>
+                  <a:lnTo>
+                    <a:pt x="5443311" y="2377386"/>
+                  </a:lnTo>
+                  <a:lnTo>
+                    <a:pt x="5514934" y="2378093"/>
+                  </a:lnTo>
+                  <a:lnTo>
+                    <a:pt x="5586557" y="2378801"/>
+                  </a:lnTo>
+                  <a:lnTo>
+                    <a:pt x="5658179" y="2379507"/>
+                  </a:lnTo>
+                  <a:lnTo>
+                    <a:pt x="5729802" y="2380213"/>
+                  </a:lnTo>
+                  <a:lnTo>
+                    <a:pt x="5801424" y="2380919"/>
+                  </a:lnTo>
+                  <a:lnTo>
+                    <a:pt x="5873047" y="2381623"/>
+                  </a:lnTo>
+                  <a:lnTo>
+                    <a:pt x="5944669" y="2382327"/>
+                  </a:lnTo>
+                  <a:lnTo>
+                    <a:pt x="6016292" y="2383031"/>
+                  </a:lnTo>
+                  <a:lnTo>
+                    <a:pt x="6087914" y="2383734"/>
+                  </a:lnTo>
+                  <a:lnTo>
+                    <a:pt x="6159537" y="2384436"/>
+                  </a:lnTo>
+                  <a:lnTo>
+                    <a:pt x="6231159" y="2385138"/>
+                  </a:lnTo>
+                  <a:lnTo>
+                    <a:pt x="6302782" y="2385839"/>
+                  </a:lnTo>
+                  <a:lnTo>
+                    <a:pt x="6374404" y="2386539"/>
+                  </a:lnTo>
+                  <a:lnTo>
+                    <a:pt x="6446027" y="2387239"/>
+                  </a:lnTo>
+                  <a:lnTo>
+                    <a:pt x="6517649" y="2387938"/>
+                  </a:lnTo>
+                  <a:lnTo>
+                    <a:pt x="6589272" y="2388637"/>
+                  </a:lnTo>
+                  <a:lnTo>
+                    <a:pt x="6660894" y="2389335"/>
+                  </a:lnTo>
+                  <a:lnTo>
+                    <a:pt x="6732517" y="2390032"/>
+                  </a:lnTo>
+                  <a:lnTo>
+                    <a:pt x="6804139" y="2390729"/>
+                  </a:lnTo>
+                  <a:lnTo>
+                    <a:pt x="6875762" y="2391425"/>
+                  </a:lnTo>
+                  <a:lnTo>
+                    <a:pt x="6947385" y="2392121"/>
+                  </a:lnTo>
+                  <a:lnTo>
+                    <a:pt x="7019007" y="2392816"/>
+                  </a:lnTo>
+                  <a:lnTo>
+                    <a:pt x="7090630" y="2393510"/>
                   </a:lnTo>
                 </a:path>
               </a:pathLst>
@@ -4388,309 +4388,309 @@
           </p:nvSpPr>
           <p:spPr>
             <a:xfrm>
-              <a:off x="1172049" y="4695557"/>
-              <a:ext cx="7090630" cy="665409"/>
+              <a:off x="1172049" y="4692430"/>
+              <a:ext cx="7090630" cy="669810"/>
             </a:xfrm>
             <a:custGeom>
               <a:avLst/>
               <a:pathLst>
-                <a:path w="7090630" h="665409">
+                <a:path w="7090630" h="669810">
                   <a:moveTo>
-                    <a:pt x="7090630" y="665409"/>
+                    <a:pt x="7090630" y="669810"/>
                   </a:moveTo>
                   <a:lnTo>
-                    <a:pt x="7019007" y="659817"/>
-                  </a:lnTo>
-                  <a:lnTo>
-                    <a:pt x="6947385" y="654065"/>
-                  </a:lnTo>
-                  <a:lnTo>
-                    <a:pt x="6875762" y="648150"/>
-                  </a:lnTo>
-                  <a:lnTo>
-                    <a:pt x="6804139" y="642066"/>
-                  </a:lnTo>
-                  <a:lnTo>
-                    <a:pt x="6732517" y="635809"/>
-                  </a:lnTo>
-                  <a:lnTo>
-                    <a:pt x="6660894" y="629373"/>
-                  </a:lnTo>
-                  <a:lnTo>
-                    <a:pt x="6589272" y="622755"/>
-                  </a:lnTo>
-                  <a:lnTo>
-                    <a:pt x="6517649" y="615947"/>
-                  </a:lnTo>
-                  <a:lnTo>
-                    <a:pt x="6446027" y="608946"/>
-                  </a:lnTo>
-                  <a:lnTo>
-                    <a:pt x="6374404" y="601745"/>
-                  </a:lnTo>
-                  <a:lnTo>
-                    <a:pt x="6302782" y="594339"/>
-                  </a:lnTo>
-                  <a:lnTo>
-                    <a:pt x="6231159" y="586723"/>
-                  </a:lnTo>
-                  <a:lnTo>
-                    <a:pt x="6159537" y="578889"/>
-                  </a:lnTo>
-                  <a:lnTo>
-                    <a:pt x="6087914" y="570832"/>
-                  </a:lnTo>
-                  <a:lnTo>
-                    <a:pt x="6016292" y="562545"/>
-                  </a:lnTo>
-                  <a:lnTo>
-                    <a:pt x="5944669" y="554022"/>
-                  </a:lnTo>
-                  <a:lnTo>
-                    <a:pt x="5873047" y="545257"/>
-                  </a:lnTo>
-                  <a:lnTo>
-                    <a:pt x="5801424" y="536242"/>
-                  </a:lnTo>
-                  <a:lnTo>
-                    <a:pt x="5729802" y="526969"/>
-                  </a:lnTo>
-                  <a:lnTo>
-                    <a:pt x="5658179" y="517433"/>
-                  </a:lnTo>
-                  <a:lnTo>
-                    <a:pt x="5586557" y="507625"/>
-                  </a:lnTo>
-                  <a:lnTo>
-                    <a:pt x="5514934" y="497538"/>
-                  </a:lnTo>
-                  <a:lnTo>
-                    <a:pt x="5443311" y="487163"/>
-                  </a:lnTo>
-                  <a:lnTo>
-                    <a:pt x="5371689" y="476493"/>
-                  </a:lnTo>
-                  <a:lnTo>
-                    <a:pt x="5300066" y="465518"/>
-                  </a:lnTo>
-                  <a:lnTo>
-                    <a:pt x="5228444" y="454231"/>
-                  </a:lnTo>
-                  <a:lnTo>
-                    <a:pt x="5156821" y="442623"/>
-                  </a:lnTo>
-                  <a:lnTo>
-                    <a:pt x="5085199" y="430684"/>
-                  </a:lnTo>
-                  <a:lnTo>
-                    <a:pt x="5013576" y="418404"/>
-                  </a:lnTo>
-                  <a:lnTo>
-                    <a:pt x="4941954" y="405775"/>
-                  </a:lnTo>
-                  <a:lnTo>
-                    <a:pt x="4870331" y="392786"/>
-                  </a:lnTo>
-                  <a:lnTo>
-                    <a:pt x="4798709" y="379427"/>
-                  </a:lnTo>
-                  <a:lnTo>
-                    <a:pt x="4727086" y="365687"/>
-                  </a:lnTo>
-                  <a:lnTo>
-                    <a:pt x="4655464" y="351556"/>
-                  </a:lnTo>
-                  <a:lnTo>
-                    <a:pt x="4583841" y="337022"/>
-                  </a:lnTo>
-                  <a:lnTo>
-                    <a:pt x="4512219" y="322074"/>
-                  </a:lnTo>
-                  <a:lnTo>
-                    <a:pt x="4440596" y="306700"/>
-                  </a:lnTo>
-                  <a:lnTo>
-                    <a:pt x="4368974" y="290889"/>
-                  </a:lnTo>
-                  <a:lnTo>
-                    <a:pt x="4297351" y="274627"/>
-                  </a:lnTo>
-                  <a:lnTo>
-                    <a:pt x="4225729" y="257901"/>
-                  </a:lnTo>
-                  <a:lnTo>
-                    <a:pt x="4154106" y="240699"/>
-                  </a:lnTo>
-                  <a:lnTo>
-                    <a:pt x="4082483" y="223007"/>
-                  </a:lnTo>
-                  <a:lnTo>
-                    <a:pt x="4010861" y="204811"/>
-                  </a:lnTo>
-                  <a:lnTo>
-                    <a:pt x="3939238" y="186096"/>
-                  </a:lnTo>
-                  <a:lnTo>
-                    <a:pt x="3867616" y="166849"/>
-                  </a:lnTo>
-                  <a:lnTo>
-                    <a:pt x="3795993" y="147052"/>
-                  </a:lnTo>
-                  <a:lnTo>
-                    <a:pt x="3724371" y="126692"/>
-                  </a:lnTo>
-                  <a:lnTo>
-                    <a:pt x="3652748" y="105752"/>
-                  </a:lnTo>
-                  <a:lnTo>
-                    <a:pt x="3581126" y="84215"/>
-                  </a:lnTo>
-                  <a:lnTo>
-                    <a:pt x="3509503" y="62065"/>
-                  </a:lnTo>
-                  <a:lnTo>
-                    <a:pt x="3437881" y="39284"/>
-                  </a:lnTo>
-                  <a:lnTo>
-                    <a:pt x="3366258" y="31767"/>
-                  </a:lnTo>
-                  <a:lnTo>
-                    <a:pt x="3294636" y="31104"/>
-                  </a:lnTo>
-                  <a:lnTo>
-                    <a:pt x="3223013" y="30439"/>
-                  </a:lnTo>
-                  <a:lnTo>
-                    <a:pt x="3151391" y="29775"/>
-                  </a:lnTo>
-                  <a:lnTo>
-                    <a:pt x="3079768" y="29110"/>
-                  </a:lnTo>
-                  <a:lnTo>
-                    <a:pt x="3008146" y="28444"/>
-                  </a:lnTo>
-                  <a:lnTo>
-                    <a:pt x="2936523" y="27778"/>
-                  </a:lnTo>
-                  <a:lnTo>
-                    <a:pt x="2864901" y="27111"/>
-                  </a:lnTo>
-                  <a:lnTo>
-                    <a:pt x="2793278" y="26444"/>
-                  </a:lnTo>
-                  <a:lnTo>
-                    <a:pt x="2721655" y="25776"/>
-                  </a:lnTo>
-                  <a:lnTo>
-                    <a:pt x="2650033" y="25108"/>
-                  </a:lnTo>
-                  <a:lnTo>
-                    <a:pt x="2578410" y="24439"/>
-                  </a:lnTo>
-                  <a:lnTo>
-                    <a:pt x="2506788" y="23769"/>
-                  </a:lnTo>
-                  <a:lnTo>
-                    <a:pt x="2435165" y="23099"/>
-                  </a:lnTo>
-                  <a:lnTo>
-                    <a:pt x="2363543" y="22429"/>
-                  </a:lnTo>
-                  <a:lnTo>
-                    <a:pt x="2291920" y="21758"/>
-                  </a:lnTo>
-                  <a:lnTo>
-                    <a:pt x="2220298" y="21086"/>
-                  </a:lnTo>
-                  <a:lnTo>
-                    <a:pt x="2148675" y="20414"/>
-                  </a:lnTo>
-                  <a:lnTo>
-                    <a:pt x="2077053" y="19742"/>
-                  </a:lnTo>
-                  <a:lnTo>
-                    <a:pt x="2005430" y="19068"/>
-                  </a:lnTo>
-                  <a:lnTo>
-                    <a:pt x="1933808" y="18395"/>
-                  </a:lnTo>
-                  <a:lnTo>
-                    <a:pt x="1862185" y="17720"/>
-                  </a:lnTo>
-                  <a:lnTo>
-                    <a:pt x="1790563" y="17046"/>
-                  </a:lnTo>
-                  <a:lnTo>
-                    <a:pt x="1718940" y="16370"/>
-                  </a:lnTo>
-                  <a:lnTo>
-                    <a:pt x="1647318" y="15694"/>
-                  </a:lnTo>
-                  <a:lnTo>
-                    <a:pt x="1575695" y="15018"/>
-                  </a:lnTo>
-                  <a:lnTo>
-                    <a:pt x="1504073" y="14341"/>
-                  </a:lnTo>
-                  <a:lnTo>
-                    <a:pt x="1432450" y="13664"/>
-                  </a:lnTo>
-                  <a:lnTo>
-                    <a:pt x="1360827" y="12986"/>
-                  </a:lnTo>
-                  <a:lnTo>
-                    <a:pt x="1289205" y="12307"/>
-                  </a:lnTo>
-                  <a:lnTo>
-                    <a:pt x="1217582" y="11628"/>
-                  </a:lnTo>
-                  <a:lnTo>
-                    <a:pt x="1145960" y="10948"/>
-                  </a:lnTo>
-                  <a:lnTo>
-                    <a:pt x="1074337" y="10268"/>
-                  </a:lnTo>
-                  <a:lnTo>
-                    <a:pt x="1002715" y="9587"/>
-                  </a:lnTo>
-                  <a:lnTo>
-                    <a:pt x="931092" y="8906"/>
-                  </a:lnTo>
-                  <a:lnTo>
-                    <a:pt x="859470" y="8224"/>
-                  </a:lnTo>
-                  <a:lnTo>
-                    <a:pt x="787847" y="7542"/>
-                  </a:lnTo>
-                  <a:lnTo>
-                    <a:pt x="716225" y="6859"/>
-                  </a:lnTo>
-                  <a:lnTo>
-                    <a:pt x="644602" y="6175"/>
-                  </a:lnTo>
-                  <a:lnTo>
-                    <a:pt x="572980" y="5491"/>
-                  </a:lnTo>
-                  <a:lnTo>
-                    <a:pt x="501357" y="4807"/>
-                  </a:lnTo>
-                  <a:lnTo>
-                    <a:pt x="429735" y="4122"/>
-                  </a:lnTo>
-                  <a:lnTo>
-                    <a:pt x="358112" y="3436"/>
-                  </a:lnTo>
-                  <a:lnTo>
-                    <a:pt x="286490" y="2750"/>
-                  </a:lnTo>
-                  <a:lnTo>
-                    <a:pt x="214867" y="2063"/>
-                  </a:lnTo>
-                  <a:lnTo>
-                    <a:pt x="143245" y="1376"/>
-                  </a:lnTo>
-                  <a:lnTo>
-                    <a:pt x="71622" y="688"/>
+                    <a:pt x="7019007" y="664229"/>
+                  </a:lnTo>
+                  <a:lnTo>
+                    <a:pt x="6947385" y="658488"/>
+                  </a:lnTo>
+                  <a:lnTo>
+                    <a:pt x="6875762" y="652582"/>
+                  </a:lnTo>
+                  <a:lnTo>
+                    <a:pt x="6804139" y="646508"/>
+                  </a:lnTo>
+                  <a:lnTo>
+                    <a:pt x="6732517" y="640260"/>
+                  </a:lnTo>
+                  <a:lnTo>
+                    <a:pt x="6660894" y="633833"/>
+                  </a:lnTo>
+                  <a:lnTo>
+                    <a:pt x="6589272" y="627222"/>
+                  </a:lnTo>
+                  <a:lnTo>
+                    <a:pt x="6517649" y="620422"/>
+                  </a:lnTo>
+                  <a:lnTo>
+                    <a:pt x="6446027" y="613427"/>
+                  </a:lnTo>
+                  <a:lnTo>
+                    <a:pt x="6374404" y="606232"/>
+                  </a:lnTo>
+                  <a:lnTo>
+                    <a:pt x="6302782" y="598831"/>
+                  </a:lnTo>
+                  <a:lnTo>
+                    <a:pt x="6231159" y="591218"/>
+                  </a:lnTo>
+                  <a:lnTo>
+                    <a:pt x="6159537" y="583388"/>
+                  </a:lnTo>
+                  <a:lnTo>
+                    <a:pt x="6087914" y="575333"/>
+                  </a:lnTo>
+                  <a:lnTo>
+                    <a:pt x="6016292" y="567048"/>
+                  </a:lnTo>
+                  <a:lnTo>
+                    <a:pt x="5944669" y="558525"/>
+                  </a:lnTo>
+                  <a:lnTo>
+                    <a:pt x="5873047" y="549759"/>
+                  </a:lnTo>
+                  <a:lnTo>
+                    <a:pt x="5801424" y="540742"/>
+                  </a:lnTo>
+                  <a:lnTo>
+                    <a:pt x="5729802" y="531466"/>
+                  </a:lnTo>
+                  <a:lnTo>
+                    <a:pt x="5658179" y="521926"/>
+                  </a:lnTo>
+                  <a:lnTo>
+                    <a:pt x="5586557" y="512112"/>
+                  </a:lnTo>
+                  <a:lnTo>
+                    <a:pt x="5514934" y="502017"/>
+                  </a:lnTo>
+                  <a:lnTo>
+                    <a:pt x="5443311" y="491634"/>
+                  </a:lnTo>
+                  <a:lnTo>
+                    <a:pt x="5371689" y="480953"/>
+                  </a:lnTo>
+                  <a:lnTo>
+                    <a:pt x="5300066" y="469966"/>
+                  </a:lnTo>
+                  <a:lnTo>
+                    <a:pt x="5228444" y="458665"/>
+                  </a:lnTo>
+                  <a:lnTo>
+                    <a:pt x="5156821" y="447041"/>
+                  </a:lnTo>
+                  <a:lnTo>
+                    <a:pt x="5085199" y="435084"/>
+                  </a:lnTo>
+                  <a:lnTo>
+                    <a:pt x="5013576" y="422785"/>
+                  </a:lnTo>
+                  <a:lnTo>
+                    <a:pt x="4941954" y="410133"/>
+                  </a:lnTo>
+                  <a:lnTo>
+                    <a:pt x="4870331" y="397120"/>
+                  </a:lnTo>
+                  <a:lnTo>
+                    <a:pt x="4798709" y="383734"/>
+                  </a:lnTo>
+                  <a:lnTo>
+                    <a:pt x="4727086" y="369965"/>
+                  </a:lnTo>
+                  <a:lnTo>
+                    <a:pt x="4655464" y="355802"/>
+                  </a:lnTo>
+                  <a:lnTo>
+                    <a:pt x="4583841" y="341234"/>
+                  </a:lnTo>
+                  <a:lnTo>
+                    <a:pt x="4512219" y="326248"/>
+                  </a:lnTo>
+                  <a:lnTo>
+                    <a:pt x="4440596" y="310834"/>
+                  </a:lnTo>
+                  <a:lnTo>
+                    <a:pt x="4368974" y="294979"/>
+                  </a:lnTo>
+                  <a:lnTo>
+                    <a:pt x="4297351" y="278670"/>
+                  </a:lnTo>
+                  <a:lnTo>
+                    <a:pt x="4225729" y="261894"/>
+                  </a:lnTo>
+                  <a:lnTo>
+                    <a:pt x="4154106" y="244638"/>
+                  </a:lnTo>
+                  <a:lnTo>
+                    <a:pt x="4082483" y="226888"/>
+                  </a:lnTo>
+                  <a:lnTo>
+                    <a:pt x="4010861" y="208630"/>
+                  </a:lnTo>
+                  <a:lnTo>
+                    <a:pt x="3939238" y="189849"/>
+                  </a:lnTo>
+                  <a:lnTo>
+                    <a:pt x="3867616" y="170531"/>
+                  </a:lnTo>
+                  <a:lnTo>
+                    <a:pt x="3795993" y="150660"/>
+                  </a:lnTo>
+                  <a:lnTo>
+                    <a:pt x="3724371" y="130221"/>
+                  </a:lnTo>
+                  <a:lnTo>
+                    <a:pt x="3652748" y="109196"/>
+                  </a:lnTo>
+                  <a:lnTo>
+                    <a:pt x="3581126" y="87570"/>
+                  </a:lnTo>
+                  <a:lnTo>
+                    <a:pt x="3509503" y="65324"/>
+                  </a:lnTo>
+                  <a:lnTo>
+                    <a:pt x="3437881" y="42442"/>
+                  </a:lnTo>
+                  <a:lnTo>
+                    <a:pt x="3366258" y="34850"/>
+                  </a:lnTo>
+                  <a:lnTo>
+                    <a:pt x="3294636" y="34123"/>
+                  </a:lnTo>
+                  <a:lnTo>
+                    <a:pt x="3223013" y="33396"/>
+                  </a:lnTo>
+                  <a:lnTo>
+                    <a:pt x="3151391" y="32668"/>
+                  </a:lnTo>
+                  <a:lnTo>
+                    <a:pt x="3079768" y="31939"/>
+                  </a:lnTo>
+                  <a:lnTo>
+                    <a:pt x="3008146" y="31210"/>
+                  </a:lnTo>
+                  <a:lnTo>
+                    <a:pt x="2936523" y="30480"/>
+                  </a:lnTo>
+                  <a:lnTo>
+                    <a:pt x="2864901" y="29750"/>
+                  </a:lnTo>
+                  <a:lnTo>
+                    <a:pt x="2793278" y="29019"/>
+                  </a:lnTo>
+                  <a:lnTo>
+                    <a:pt x="2721655" y="28287"/>
+                  </a:lnTo>
+                  <a:lnTo>
+                    <a:pt x="2650033" y="27554"/>
+                  </a:lnTo>
+                  <a:lnTo>
+                    <a:pt x="2578410" y="26821"/>
+                  </a:lnTo>
+                  <a:lnTo>
+                    <a:pt x="2506788" y="26088"/>
+                  </a:lnTo>
+                  <a:lnTo>
+                    <a:pt x="2435165" y="25353"/>
+                  </a:lnTo>
+                  <a:lnTo>
+                    <a:pt x="2363543" y="24618"/>
+                  </a:lnTo>
+                  <a:lnTo>
+                    <a:pt x="2291920" y="23883"/>
+                  </a:lnTo>
+                  <a:lnTo>
+                    <a:pt x="2220298" y="23146"/>
+                  </a:lnTo>
+                  <a:lnTo>
+                    <a:pt x="2148675" y="22410"/>
+                  </a:lnTo>
+                  <a:lnTo>
+                    <a:pt x="2077053" y="21672"/>
+                  </a:lnTo>
+                  <a:lnTo>
+                    <a:pt x="2005430" y="20934"/>
+                  </a:lnTo>
+                  <a:lnTo>
+                    <a:pt x="1933808" y="20195"/>
+                  </a:lnTo>
+                  <a:lnTo>
+                    <a:pt x="1862185" y="19455"/>
+                  </a:lnTo>
+                  <a:lnTo>
+                    <a:pt x="1790563" y="18715"/>
+                  </a:lnTo>
+                  <a:lnTo>
+                    <a:pt x="1718940" y="17975"/>
+                  </a:lnTo>
+                  <a:lnTo>
+                    <a:pt x="1647318" y="17233"/>
+                  </a:lnTo>
+                  <a:lnTo>
+                    <a:pt x="1575695" y="16491"/>
+                  </a:lnTo>
+                  <a:lnTo>
+                    <a:pt x="1504073" y="15748"/>
+                  </a:lnTo>
+                  <a:lnTo>
+                    <a:pt x="1432450" y="15005"/>
+                  </a:lnTo>
+                  <a:lnTo>
+                    <a:pt x="1360827" y="14261"/>
+                  </a:lnTo>
+                  <a:lnTo>
+                    <a:pt x="1289205" y="13516"/>
+                  </a:lnTo>
+                  <a:lnTo>
+                    <a:pt x="1217582" y="12771"/>
+                  </a:lnTo>
+                  <a:lnTo>
+                    <a:pt x="1145960" y="12025"/>
+                  </a:lnTo>
+                  <a:lnTo>
+                    <a:pt x="1074337" y="11278"/>
+                  </a:lnTo>
+                  <a:lnTo>
+                    <a:pt x="1002715" y="10531"/>
+                  </a:lnTo>
+                  <a:lnTo>
+                    <a:pt x="931092" y="9783"/>
+                  </a:lnTo>
+                  <a:lnTo>
+                    <a:pt x="859470" y="9034"/>
+                  </a:lnTo>
+                  <a:lnTo>
+                    <a:pt x="787847" y="8285"/>
+                  </a:lnTo>
+                  <a:lnTo>
+                    <a:pt x="716225" y="7535"/>
+                  </a:lnTo>
+                  <a:lnTo>
+                    <a:pt x="644602" y="6784"/>
+                  </a:lnTo>
+                  <a:lnTo>
+                    <a:pt x="572980" y="6033"/>
+                  </a:lnTo>
+                  <a:lnTo>
+                    <a:pt x="501357" y="5281"/>
+                  </a:lnTo>
+                  <a:lnTo>
+                    <a:pt x="429735" y="4529"/>
+                  </a:lnTo>
+                  <a:lnTo>
+                    <a:pt x="358112" y="3775"/>
+                  </a:lnTo>
+                  <a:lnTo>
+                    <a:pt x="286490" y="3022"/>
+                  </a:lnTo>
+                  <a:lnTo>
+                    <a:pt x="214867" y="2267"/>
+                  </a:lnTo>
+                  <a:lnTo>
+                    <a:pt x="143245" y="1512"/>
+                  </a:lnTo>
+                  <a:lnTo>
+                    <a:pt x="71622" y="756"/>
                   </a:lnTo>
                   <a:lnTo>
                     <a:pt x="0" y="0"/>
@@ -4713,312 +4713,312 @@
           </p:nvSpPr>
           <p:spPr>
             <a:xfrm>
-              <a:off x="1172049" y="3905205"/>
-              <a:ext cx="7090630" cy="1256735"/>
+              <a:off x="1172049" y="3897191"/>
+              <a:ext cx="7090630" cy="1266802"/>
             </a:xfrm>
             <a:custGeom>
               <a:avLst/>
               <a:pathLst>
-                <a:path w="7090630" h="1256735">
+                <a:path w="7090630" h="1266802">
                   <a:moveTo>
                     <a:pt x="0" y="0"/>
                   </a:moveTo>
                   <a:lnTo>
-                    <a:pt x="71622" y="23693"/>
-                  </a:lnTo>
-                  <a:lnTo>
-                    <a:pt x="143245" y="47046"/>
-                  </a:lnTo>
-                  <a:lnTo>
-                    <a:pt x="214867" y="70064"/>
-                  </a:lnTo>
-                  <a:lnTo>
-                    <a:pt x="286490" y="92752"/>
-                  </a:lnTo>
-                  <a:lnTo>
-                    <a:pt x="358112" y="115115"/>
-                  </a:lnTo>
-                  <a:lnTo>
-                    <a:pt x="429735" y="137157"/>
-                  </a:lnTo>
-                  <a:lnTo>
-                    <a:pt x="501357" y="158883"/>
-                  </a:lnTo>
-                  <a:lnTo>
-                    <a:pt x="572980" y="180297"/>
-                  </a:lnTo>
-                  <a:lnTo>
-                    <a:pt x="644602" y="201405"/>
-                  </a:lnTo>
-                  <a:lnTo>
-                    <a:pt x="716225" y="222209"/>
-                  </a:lnTo>
-                  <a:lnTo>
-                    <a:pt x="787847" y="242715"/>
-                  </a:lnTo>
-                  <a:lnTo>
-                    <a:pt x="859470" y="262927"/>
-                  </a:lnTo>
-                  <a:lnTo>
-                    <a:pt x="931092" y="282849"/>
-                  </a:lnTo>
-                  <a:lnTo>
-                    <a:pt x="1002715" y="302486"/>
-                  </a:lnTo>
-                  <a:lnTo>
-                    <a:pt x="1074337" y="321841"/>
-                  </a:lnTo>
-                  <a:lnTo>
-                    <a:pt x="1145960" y="340918"/>
-                  </a:lnTo>
-                  <a:lnTo>
-                    <a:pt x="1217582" y="359722"/>
-                  </a:lnTo>
-                  <a:lnTo>
-                    <a:pt x="1289205" y="378256"/>
-                  </a:lnTo>
-                  <a:lnTo>
-                    <a:pt x="1360827" y="396524"/>
-                  </a:lnTo>
-                  <a:lnTo>
-                    <a:pt x="1432450" y="414530"/>
-                  </a:lnTo>
-                  <a:lnTo>
-                    <a:pt x="1504073" y="432278"/>
-                  </a:lnTo>
-                  <a:lnTo>
-                    <a:pt x="1575695" y="449772"/>
-                  </a:lnTo>
-                  <a:lnTo>
-                    <a:pt x="1647318" y="467014"/>
-                  </a:lnTo>
-                  <a:lnTo>
-                    <a:pt x="1718940" y="484009"/>
-                  </a:lnTo>
-                  <a:lnTo>
-                    <a:pt x="1790563" y="500761"/>
-                  </a:lnTo>
-                  <a:lnTo>
-                    <a:pt x="1862185" y="517272"/>
-                  </a:lnTo>
-                  <a:lnTo>
-                    <a:pt x="1933808" y="533547"/>
-                  </a:lnTo>
-                  <a:lnTo>
-                    <a:pt x="2005430" y="549588"/>
-                  </a:lnTo>
-                  <a:lnTo>
-                    <a:pt x="2077053" y="565399"/>
-                  </a:lnTo>
-                  <a:lnTo>
-                    <a:pt x="2148675" y="580983"/>
-                  </a:lnTo>
-                  <a:lnTo>
-                    <a:pt x="2220298" y="596344"/>
-                  </a:lnTo>
-                  <a:lnTo>
-                    <a:pt x="2291920" y="611484"/>
-                  </a:lnTo>
-                  <a:lnTo>
-                    <a:pt x="2363543" y="626407"/>
-                  </a:lnTo>
-                  <a:lnTo>
-                    <a:pt x="2435165" y="641117"/>
-                  </a:lnTo>
-                  <a:lnTo>
-                    <a:pt x="2506788" y="655615"/>
-                  </a:lnTo>
-                  <a:lnTo>
-                    <a:pt x="2578410" y="669905"/>
-                  </a:lnTo>
-                  <a:lnTo>
-                    <a:pt x="2650033" y="683991"/>
-                  </a:lnTo>
-                  <a:lnTo>
-                    <a:pt x="2721655" y="697874"/>
-                  </a:lnTo>
-                  <a:lnTo>
-                    <a:pt x="2793278" y="711559"/>
-                  </a:lnTo>
-                  <a:lnTo>
-                    <a:pt x="2864901" y="725047"/>
-                  </a:lnTo>
-                  <a:lnTo>
-                    <a:pt x="2936523" y="738341"/>
-                  </a:lnTo>
-                  <a:lnTo>
-                    <a:pt x="3008146" y="751445"/>
-                  </a:lnTo>
-                  <a:lnTo>
-                    <a:pt x="3079768" y="764361"/>
-                  </a:lnTo>
-                  <a:lnTo>
-                    <a:pt x="3151391" y="777092"/>
-                  </a:lnTo>
-                  <a:lnTo>
-                    <a:pt x="3223013" y="789641"/>
-                  </a:lnTo>
-                  <a:lnTo>
-                    <a:pt x="3294636" y="802009"/>
-                  </a:lnTo>
-                  <a:lnTo>
-                    <a:pt x="3366258" y="814200"/>
-                  </a:lnTo>
-                  <a:lnTo>
-                    <a:pt x="3437881" y="826216"/>
-                  </a:lnTo>
-                  <a:lnTo>
-                    <a:pt x="3509503" y="838059"/>
-                  </a:lnTo>
-                  <a:lnTo>
-                    <a:pt x="3581126" y="849733"/>
-                  </a:lnTo>
-                  <a:lnTo>
-                    <a:pt x="3652748" y="861240"/>
-                  </a:lnTo>
-                  <a:lnTo>
-                    <a:pt x="3724371" y="872581"/>
-                  </a:lnTo>
-                  <a:lnTo>
-                    <a:pt x="3795993" y="883760"/>
-                  </a:lnTo>
-                  <a:lnTo>
-                    <a:pt x="3867616" y="894778"/>
-                  </a:lnTo>
-                  <a:lnTo>
-                    <a:pt x="3939238" y="905639"/>
-                  </a:lnTo>
-                  <a:lnTo>
-                    <a:pt x="4010861" y="916343"/>
-                  </a:lnTo>
-                  <a:lnTo>
-                    <a:pt x="4082483" y="926895"/>
-                  </a:lnTo>
-                  <a:lnTo>
-                    <a:pt x="4154106" y="937294"/>
-                  </a:lnTo>
-                  <a:lnTo>
-                    <a:pt x="4225729" y="947545"/>
-                  </a:lnTo>
-                  <a:lnTo>
-                    <a:pt x="4297351" y="957649"/>
-                  </a:lnTo>
-                  <a:lnTo>
-                    <a:pt x="4368974" y="967607"/>
-                  </a:lnTo>
-                  <a:lnTo>
-                    <a:pt x="4440596" y="977423"/>
-                  </a:lnTo>
-                  <a:lnTo>
-                    <a:pt x="4512219" y="987099"/>
-                  </a:lnTo>
-                  <a:lnTo>
-                    <a:pt x="4583841" y="996635"/>
-                  </a:lnTo>
-                  <a:lnTo>
-                    <a:pt x="4655464" y="1006035"/>
-                  </a:lnTo>
-                  <a:lnTo>
-                    <a:pt x="4727086" y="1015299"/>
-                  </a:lnTo>
-                  <a:lnTo>
-                    <a:pt x="4798709" y="1024431"/>
-                  </a:lnTo>
-                  <a:lnTo>
-                    <a:pt x="4870331" y="1033432"/>
-                  </a:lnTo>
-                  <a:lnTo>
-                    <a:pt x="4941954" y="1042304"/>
-                  </a:lnTo>
-                  <a:lnTo>
-                    <a:pt x="5013576" y="1051049"/>
-                  </a:lnTo>
-                  <a:lnTo>
-                    <a:pt x="5085199" y="1059668"/>
-                  </a:lnTo>
-                  <a:lnTo>
-                    <a:pt x="5156821" y="1068164"/>
-                  </a:lnTo>
-                  <a:lnTo>
-                    <a:pt x="5228444" y="1076538"/>
-                  </a:lnTo>
-                  <a:lnTo>
-                    <a:pt x="5300066" y="1084791"/>
-                  </a:lnTo>
-                  <a:lnTo>
-                    <a:pt x="5371689" y="1092927"/>
-                  </a:lnTo>
-                  <a:lnTo>
-                    <a:pt x="5443311" y="1100945"/>
-                  </a:lnTo>
-                  <a:lnTo>
-                    <a:pt x="5514934" y="1108849"/>
-                  </a:lnTo>
-                  <a:lnTo>
-                    <a:pt x="5586557" y="1116639"/>
-                  </a:lnTo>
-                  <a:lnTo>
-                    <a:pt x="5658179" y="1124318"/>
-                  </a:lnTo>
-                  <a:lnTo>
-                    <a:pt x="5729802" y="1131886"/>
-                  </a:lnTo>
-                  <a:lnTo>
-                    <a:pt x="5801424" y="1139346"/>
-                  </a:lnTo>
-                  <a:lnTo>
-                    <a:pt x="5873047" y="1146699"/>
-                  </a:lnTo>
-                  <a:lnTo>
-                    <a:pt x="5944669" y="1153946"/>
-                  </a:lnTo>
-                  <a:lnTo>
-                    <a:pt x="6016292" y="1161090"/>
-                  </a:lnTo>
-                  <a:lnTo>
-                    <a:pt x="6087914" y="1168131"/>
-                  </a:lnTo>
-                  <a:lnTo>
-                    <a:pt x="6159537" y="1175071"/>
-                  </a:lnTo>
-                  <a:lnTo>
-                    <a:pt x="6231159" y="1181912"/>
-                  </a:lnTo>
-                  <a:lnTo>
-                    <a:pt x="6302782" y="1188654"/>
-                  </a:lnTo>
-                  <a:lnTo>
-                    <a:pt x="6374404" y="1195300"/>
-                  </a:lnTo>
-                  <a:lnTo>
-                    <a:pt x="6446027" y="1201850"/>
-                  </a:lnTo>
-                  <a:lnTo>
-                    <a:pt x="6517649" y="1208307"/>
-                  </a:lnTo>
-                  <a:lnTo>
-                    <a:pt x="6589272" y="1214671"/>
-                  </a:lnTo>
-                  <a:lnTo>
-                    <a:pt x="6660894" y="1220943"/>
-                  </a:lnTo>
-                  <a:lnTo>
-                    <a:pt x="6732517" y="1227126"/>
-                  </a:lnTo>
-                  <a:lnTo>
-                    <a:pt x="6804139" y="1233220"/>
-                  </a:lnTo>
-                  <a:lnTo>
-                    <a:pt x="6875762" y="1239227"/>
-                  </a:lnTo>
-                  <a:lnTo>
-                    <a:pt x="6947385" y="1245147"/>
-                  </a:lnTo>
-                  <a:lnTo>
-                    <a:pt x="7019007" y="1250983"/>
-                  </a:lnTo>
-                  <a:lnTo>
-                    <a:pt x="7090630" y="1256735"/>
+                    <a:pt x="71622" y="23973"/>
+                  </a:lnTo>
+                  <a:lnTo>
+                    <a:pt x="143245" y="47601"/>
+                  </a:lnTo>
+                  <a:lnTo>
+                    <a:pt x="214867" y="70888"/>
+                  </a:lnTo>
+                  <a:lnTo>
+                    <a:pt x="286490" y="93838"/>
+                  </a:lnTo>
+                  <a:lnTo>
+                    <a:pt x="358112" y="116457"/>
+                  </a:lnTo>
+                  <a:lnTo>
+                    <a:pt x="429735" y="138749"/>
+                  </a:lnTo>
+                  <a:lnTo>
+                    <a:pt x="501357" y="160719"/>
+                  </a:lnTo>
+                  <a:lnTo>
+                    <a:pt x="572980" y="182372"/>
+                  </a:lnTo>
+                  <a:lnTo>
+                    <a:pt x="644602" y="203712"/>
+                  </a:lnTo>
+                  <a:lnTo>
+                    <a:pt x="716225" y="224744"/>
+                  </a:lnTo>
+                  <a:lnTo>
+                    <a:pt x="787847" y="245472"/>
+                  </a:lnTo>
+                  <a:lnTo>
+                    <a:pt x="859470" y="265901"/>
+                  </a:lnTo>
+                  <a:lnTo>
+                    <a:pt x="931092" y="286035"/>
+                  </a:lnTo>
+                  <a:lnTo>
+                    <a:pt x="1002715" y="305878"/>
+                  </a:lnTo>
+                  <a:lnTo>
+                    <a:pt x="1074337" y="325435"/>
+                  </a:lnTo>
+                  <a:lnTo>
+                    <a:pt x="1145960" y="344709"/>
+                  </a:lnTo>
+                  <a:lnTo>
+                    <a:pt x="1217582" y="363705"/>
+                  </a:lnTo>
+                  <a:lnTo>
+                    <a:pt x="1289205" y="382426"/>
+                  </a:lnTo>
+                  <a:lnTo>
+                    <a:pt x="1360827" y="400877"/>
+                  </a:lnTo>
+                  <a:lnTo>
+                    <a:pt x="1432450" y="419062"/>
+                  </a:lnTo>
+                  <a:lnTo>
+                    <a:pt x="1504073" y="436984"/>
+                  </a:lnTo>
+                  <a:lnTo>
+                    <a:pt x="1575695" y="454647"/>
+                  </a:lnTo>
+                  <a:lnTo>
+                    <a:pt x="1647318" y="472055"/>
+                  </a:lnTo>
+                  <a:lnTo>
+                    <a:pt x="1718940" y="489212"/>
+                  </a:lnTo>
+                  <a:lnTo>
+                    <a:pt x="1790563" y="506121"/>
+                  </a:lnTo>
+                  <a:lnTo>
+                    <a:pt x="1862185" y="522786"/>
+                  </a:lnTo>
+                  <a:lnTo>
+                    <a:pt x="1933808" y="539210"/>
+                  </a:lnTo>
+                  <a:lnTo>
+                    <a:pt x="2005430" y="555397"/>
+                  </a:lnTo>
+                  <a:lnTo>
+                    <a:pt x="2077053" y="571350"/>
+                  </a:lnTo>
+                  <a:lnTo>
+                    <a:pt x="2148675" y="587072"/>
+                  </a:lnTo>
+                  <a:lnTo>
+                    <a:pt x="2220298" y="602568"/>
+                  </a:lnTo>
+                  <a:lnTo>
+                    <a:pt x="2291920" y="617840"/>
+                  </a:lnTo>
+                  <a:lnTo>
+                    <a:pt x="2363543" y="632891"/>
+                  </a:lnTo>
+                  <a:lnTo>
+                    <a:pt x="2435165" y="647725"/>
+                  </a:lnTo>
+                  <a:lnTo>
+                    <a:pt x="2506788" y="662345"/>
+                  </a:lnTo>
+                  <a:lnTo>
+                    <a:pt x="2578410" y="676754"/>
+                  </a:lnTo>
+                  <a:lnTo>
+                    <a:pt x="2650033" y="690954"/>
+                  </a:lnTo>
+                  <a:lnTo>
+                    <a:pt x="2721655" y="704950"/>
+                  </a:lnTo>
+                  <a:lnTo>
+                    <a:pt x="2793278" y="718743"/>
+                  </a:lnTo>
+                  <a:lnTo>
+                    <a:pt x="2864901" y="732337"/>
+                  </a:lnTo>
+                  <a:lnTo>
+                    <a:pt x="2936523" y="745735"/>
+                  </a:lnTo>
+                  <a:lnTo>
+                    <a:pt x="3008146" y="758939"/>
+                  </a:lnTo>
+                  <a:lnTo>
+                    <a:pt x="3079768" y="771953"/>
+                  </a:lnTo>
+                  <a:lnTo>
+                    <a:pt x="3151391" y="784779"/>
+                  </a:lnTo>
+                  <a:lnTo>
+                    <a:pt x="3223013" y="797419"/>
+                  </a:lnTo>
+                  <a:lnTo>
+                    <a:pt x="3294636" y="809877"/>
+                  </a:lnTo>
+                  <a:lnTo>
+                    <a:pt x="3366258" y="822155"/>
+                  </a:lnTo>
+                  <a:lnTo>
+                    <a:pt x="3437881" y="834256"/>
+                  </a:lnTo>
+                  <a:lnTo>
+                    <a:pt x="3509503" y="846182"/>
+                  </a:lnTo>
+                  <a:lnTo>
+                    <a:pt x="3581126" y="857935"/>
+                  </a:lnTo>
+                  <a:lnTo>
+                    <a:pt x="3652748" y="869519"/>
+                  </a:lnTo>
+                  <a:lnTo>
+                    <a:pt x="3724371" y="880936"/>
+                  </a:lnTo>
+                  <a:lnTo>
+                    <a:pt x="3795993" y="892188"/>
+                  </a:lnTo>
+                  <a:lnTo>
+                    <a:pt x="3867616" y="903277"/>
+                  </a:lnTo>
+                  <a:lnTo>
+                    <a:pt x="3939238" y="914206"/>
+                  </a:lnTo>
+                  <a:lnTo>
+                    <a:pt x="4010861" y="924977"/>
+                  </a:lnTo>
+                  <a:lnTo>
+                    <a:pt x="4082483" y="935593"/>
+                  </a:lnTo>
+                  <a:lnTo>
+                    <a:pt x="4154106" y="946056"/>
+                  </a:lnTo>
+                  <a:lnTo>
+                    <a:pt x="4225729" y="956367"/>
+                  </a:lnTo>
+                  <a:lnTo>
+                    <a:pt x="4297351" y="966529"/>
+                  </a:lnTo>
+                  <a:lnTo>
+                    <a:pt x="4368974" y="976545"/>
+                  </a:lnTo>
+                  <a:lnTo>
+                    <a:pt x="4440596" y="986416"/>
+                  </a:lnTo>
+                  <a:lnTo>
+                    <a:pt x="4512219" y="996145"/>
+                  </a:lnTo>
+                  <a:lnTo>
+                    <a:pt x="4583841" y="1005733"/>
+                  </a:lnTo>
+                  <a:lnTo>
+                    <a:pt x="4655464" y="1015182"/>
+                  </a:lnTo>
+                  <a:lnTo>
+                    <a:pt x="4727086" y="1024495"/>
+                  </a:lnTo>
+                  <a:lnTo>
+                    <a:pt x="4798709" y="1033674"/>
+                  </a:lnTo>
+                  <a:lnTo>
+                    <a:pt x="4870331" y="1042720"/>
+                  </a:lnTo>
+                  <a:lnTo>
+                    <a:pt x="4941954" y="1051635"/>
+                  </a:lnTo>
+                  <a:lnTo>
+                    <a:pt x="5013576" y="1060422"/>
+                  </a:lnTo>
+                  <a:lnTo>
+                    <a:pt x="5085199" y="1069082"/>
+                  </a:lnTo>
+                  <a:lnTo>
+                    <a:pt x="5156821" y="1077616"/>
+                  </a:lnTo>
+                  <a:lnTo>
+                    <a:pt x="5228444" y="1086028"/>
+                  </a:lnTo>
+                  <a:lnTo>
+                    <a:pt x="5300066" y="1094318"/>
+                  </a:lnTo>
+                  <a:lnTo>
+                    <a:pt x="5371689" y="1102488"/>
+                  </a:lnTo>
+                  <a:lnTo>
+                    <a:pt x="5443311" y="1110540"/>
+                  </a:lnTo>
+                  <a:lnTo>
+                    <a:pt x="5514934" y="1118476"/>
+                  </a:lnTo>
+                  <a:lnTo>
+                    <a:pt x="5586557" y="1126297"/>
+                  </a:lnTo>
+                  <a:lnTo>
+                    <a:pt x="5658179" y="1134006"/>
+                  </a:lnTo>
+                  <a:lnTo>
+                    <a:pt x="5729802" y="1141603"/>
+                  </a:lnTo>
+                  <a:lnTo>
+                    <a:pt x="5801424" y="1149090"/>
+                  </a:lnTo>
+                  <a:lnTo>
+                    <a:pt x="5873047" y="1156469"/>
+                  </a:lnTo>
+                  <a:lnTo>
+                    <a:pt x="5944669" y="1163742"/>
+                  </a:lnTo>
+                  <a:lnTo>
+                    <a:pt x="6016292" y="1170910"/>
+                  </a:lnTo>
+                  <a:lnTo>
+                    <a:pt x="6087914" y="1177974"/>
+                  </a:lnTo>
+                  <a:lnTo>
+                    <a:pt x="6159537" y="1184936"/>
+                  </a:lnTo>
+                  <a:lnTo>
+                    <a:pt x="6231159" y="1191797"/>
+                  </a:lnTo>
+                  <a:lnTo>
+                    <a:pt x="6302782" y="1198560"/>
+                  </a:lnTo>
+                  <a:lnTo>
+                    <a:pt x="6374404" y="1205225"/>
+                  </a:lnTo>
+                  <a:lnTo>
+                    <a:pt x="6446027" y="1211793"/>
+                  </a:lnTo>
+                  <a:lnTo>
+                    <a:pt x="6517649" y="1218267"/>
+                  </a:lnTo>
+                  <a:lnTo>
+                    <a:pt x="6589272" y="1224647"/>
+                  </a:lnTo>
+                  <a:lnTo>
+                    <a:pt x="6660894" y="1230935"/>
+                  </a:lnTo>
+                  <a:lnTo>
+                    <a:pt x="6732517" y="1237132"/>
+                  </a:lnTo>
+                  <a:lnTo>
+                    <a:pt x="6804139" y="1243240"/>
+                  </a:lnTo>
+                  <a:lnTo>
+                    <a:pt x="6875762" y="1249259"/>
+                  </a:lnTo>
+                  <a:lnTo>
+                    <a:pt x="6947385" y="1255192"/>
+                  </a:lnTo>
+                  <a:lnTo>
+                    <a:pt x="7019007" y="1261039"/>
+                  </a:lnTo>
+                  <a:lnTo>
+                    <a:pt x="7090630" y="1266802"/>
                   </a:lnTo>
                 </a:path>
               </a:pathLst>
@@ -5902,7 +5902,7 @@
                   <a:latin typeface="Helvetica"/>
                   <a:cs typeface="Helvetica"/>
                 </a:rPr>
-                <a:t>subHR per 10 % decline: 1.19 (1.01-1.40), p = 0.038  |  per IQR decline (Δ = 29.3 %): 1.66 (1.03-2.69)  |  IQR: [-14.6, 14.7] %</a:t>
+                <a:t>subHR per 10 % decline: 1.19 (1.01-1.40), p = 0.037  |  per IQR decline (Δ = 29.3 %): 1.67 (1.03-2.70)  |  IQR: [-14.6, 14.7] %</a:t>
               </a:r>
             </a:p>
           </p:txBody>
